--- a/temp 3.pptx
+++ b/temp 3.pptx
@@ -9,12 +9,13 @@
   </p:notesMasterIdLst>
   <p:sldIdLst>
     <p:sldId xmlns:r="http://schemas.openxmlformats.org/officeDocument/2006/relationships" id="256" r:id="Rcea5bd9026864c26"/>
+    <p:sldId xmlns:ns0="http://schemas.openxmlformats.org/officeDocument/2006/relationships" id="285" ns0:id="rId36"/>
+    <p:sldId xmlns:r="http://schemas.openxmlformats.org/officeDocument/2006/relationships" id="261" r:id="R1447129fd62542a9"/>
+    <p:sldId xmlns:r="http://schemas.openxmlformats.org/officeDocument/2006/relationships" id="262" r:id="Rfe07245bf5f54f8a"/>
     <p:sldId xmlns:r="http://schemas.openxmlformats.org/officeDocument/2006/relationships" id="257" r:id="Rd615f5c056814a12"/>
     <p:sldId xmlns:r="http://schemas.openxmlformats.org/officeDocument/2006/relationships" id="258" r:id="Ra8a158bf9f1f47d7"/>
     <p:sldId xmlns:r="http://schemas.openxmlformats.org/officeDocument/2006/relationships" id="259" r:id="Rb6df22d3e2334f8b"/>
     <p:sldId xmlns:r="http://schemas.openxmlformats.org/officeDocument/2006/relationships" id="260" r:id="R002fb061f8ff4972"/>
-    <p:sldId xmlns:r="http://schemas.openxmlformats.org/officeDocument/2006/relationships" id="261" r:id="R1447129fd62542a9"/>
-    <p:sldId xmlns:r="http://schemas.openxmlformats.org/officeDocument/2006/relationships" id="262" r:id="Rfe07245bf5f54f8a"/>
     <p:sldId xmlns:r="http://schemas.openxmlformats.org/officeDocument/2006/relationships" id="263" r:id="R020d3554a70b4b43"/>
     <p:sldId xmlns:r="http://schemas.openxmlformats.org/officeDocument/2006/relationships" id="264" r:id="R6c62440ed3a44e88"/>
     <p:sldId xmlns:r="http://schemas.openxmlformats.org/officeDocument/2006/relationships" id="265" r:id="Rdf29ba2d89a747ac"/>
@@ -638,9 +639,10 @@
           </a:p>
           <a:p xmlns:a="http://schemas.openxmlformats.org/drawingml/2006/main">
             <a:r>
-              <a:t>Timed presentation: 22 minutes 30 seconds including the 3-minute activity and 1-minute debrief. Q&amp;A follows separately. Andy introduces the production system and facilitates the activity. Andy covers women’s factory work and management restrictions before handing off to Slade for staffing, pay, and labor relations. Andy leads the final course synthesis. Slade handles the antisemitism section; use a serious tone and name the harm directly. Practice to these cues rather than reading the full research notes. Reference slides are submission material and need not be read aloud. Keep eye contact during the opening question and the vote. If ahead of time, use one additional team explanation and the ethics comparison, without shortening the substantive content below 20 minutes. If behind, limit team reports to two and keep Q&amp;A after the timed conclusion.</a:t>
-            </a:r>
-          </a:p>
+              <a:t>Planned duration: 24:15 excluding Q&amp;A and reference slides. Andy opens, sets the Detroit household scene, and facilitates seven groups of four; Slade times three group reports and reveals Ford’s response. The opening activity replaces the old capacity calculation and staffing shock. Andy then explains the production system and women’s factory work; Slade covers staffing, eligibility, and later labor relations. Keep reports to three groups at 20 seconds each. Target 24 minutes in rehearsal to leave a small buffer; do not read backup research aloud. The household budget is explicitly fictional, not a verified historical price survey.</a:t>
+            </a:r>
+          </a:p>
+          <a:p xmlns:a="http://schemas.openxmlformats.org/drawingml/2006/main"/>
         </p:txBody>
       </p:sp>
       <p:sp>
@@ -708,7 +710,7 @@
           <a:lstStyle xmlns:a="http://schemas.openxmlformats.org/drawingml/2006/main"/>
           <a:p xmlns:a="http://schemas.openxmlformats.org/drawingml/2006/main">
             <a:r>
-              <a:t>RUN OF SHOW 9:05–9:50 (45 sec)</a:t>
+              <a:t>RUN OF SHOW 10:50–11:35 (45 sec)</a:t>
             </a:r>
           </a:p>
           <a:p xmlns:a="http://schemas.openxmlformats.org/drawingml/2006/main">
@@ -822,7 +824,7 @@
           <a:lstStyle xmlns:a="http://schemas.openxmlformats.org/drawingml/2006/main"/>
           <a:p xmlns:a="http://schemas.openxmlformats.org/drawingml/2006/main">
             <a:r>
-              <a:t>RUN OF SHOW 12:20–13:05 (45 sec)</a:t>
+              <a:t>RUN OF SHOW 14:05–14:50 (45 sec)</a:t>
             </a:r>
           </a:p>
           <a:p xmlns:a="http://schemas.openxmlformats.org/drawingml/2006/main">
@@ -955,7 +957,7 @@
           <a:lstStyle xmlns:a="http://schemas.openxmlformats.org/drawingml/2006/main"/>
           <a:p xmlns:a="http://schemas.openxmlformats.org/drawingml/2006/main">
             <a:r>
-              <a:t>RUN OF SHOW 13:05–14:05 (60 sec)</a:t>
+              <a:t>RUN OF SHOW 14:50–15:50 (60 sec)</a:t>
             </a:r>
           </a:p>
           <a:p xmlns:a="http://schemas.openxmlformats.org/drawingml/2006/main">
@@ -1089,7 +1091,7 @@
           <a:lstStyle xmlns:a="http://schemas.openxmlformats.org/drawingml/2006/main"/>
           <a:p xmlns:a="http://schemas.openxmlformats.org/drawingml/2006/main">
             <a:r>
-              <a:t>RUN OF SHOW 14:05–15:10 (65 sec)</a:t>
+              <a:t>RUN OF SHOW 15:50–16:55 (65 sec)</a:t>
             </a:r>
           </a:p>
           <a:p xmlns:a="http://schemas.openxmlformats.org/drawingml/2006/main">
@@ -1201,7 +1203,7 @@
           <a:lstStyle xmlns:a="http://schemas.openxmlformats.org/drawingml/2006/main"/>
           <a:p xmlns:a="http://schemas.openxmlformats.org/drawingml/2006/main">
             <a:r>
-              <a:t>RUN OF SHOW 15:10–16:05 (55 sec)</a:t>
+              <a:t>RUN OF SHOW 16:55–17:50 (55 sec)</a:t>
             </a:r>
           </a:p>
           <a:p xmlns:a="http://schemas.openxmlformats.org/drawingml/2006/main">
@@ -1330,7 +1332,7 @@
           <a:lstStyle xmlns:a="http://schemas.openxmlformats.org/drawingml/2006/main"/>
           <a:p xmlns:a="http://schemas.openxmlformats.org/drawingml/2006/main">
             <a:r>
-              <a:t>RUN OF SHOW 9:50–11:05 (75 sec)</a:t>
+              <a:t>RUN OF SHOW 11:35–12:50 (75 sec)</a:t>
             </a:r>
           </a:p>
           <a:p xmlns:a="http://schemas.openxmlformats.org/drawingml/2006/main">
@@ -1452,7 +1454,7 @@
           <a:lstStyle xmlns:a="http://schemas.openxmlformats.org/drawingml/2006/main"/>
           <a:p xmlns:a="http://schemas.openxmlformats.org/drawingml/2006/main">
             <a:r>
-              <a:t>RUN OF SHOW 11:05–12:20 (75 sec)</a:t>
+              <a:t>RUN OF SHOW 12:50–14:05 (75 sec)</a:t>
             </a:r>
           </a:p>
           <a:p xmlns:a="http://schemas.openxmlformats.org/drawingml/2006/main">
@@ -1579,7 +1581,7 @@
           <a:lstStyle xmlns:a="http://schemas.openxmlformats.org/drawingml/2006/main"/>
           <a:p xmlns:a="http://schemas.openxmlformats.org/drawingml/2006/main">
             <a:r>
-              <a:t>RUN OF SHOW 16:05–16:45 (40 sec)</a:t>
+              <a:t>RUN OF SHOW 17:50–18:30 (40 sec)</a:t>
             </a:r>
           </a:p>
           <a:p xmlns:a="http://schemas.openxmlformats.org/drawingml/2006/main">
@@ -1708,7 +1710,7 @@
           <a:lstStyle xmlns:a="http://schemas.openxmlformats.org/drawingml/2006/main"/>
           <a:p xmlns:a="http://schemas.openxmlformats.org/drawingml/2006/main">
             <a:r>
-              <a:t>RUN OF SHOW 16:45–17:35 (50 sec)</a:t>
+              <a:t>RUN OF SHOW 18:30–19:20 (50 sec)</a:t>
             </a:r>
           </a:p>
           <a:p xmlns:a="http://schemas.openxmlformats.org/drawingml/2006/main">
@@ -1842,7 +1844,7 @@
           <a:lstStyle xmlns:a="http://schemas.openxmlformats.org/drawingml/2006/main"/>
           <a:p xmlns:a="http://schemas.openxmlformats.org/drawingml/2006/main">
             <a:r>
-              <a:t>RUN OF SHOW 17:35–18:20 (45 sec)</a:t>
+              <a:t>RUN OF SHOW 19:20–20:05 (45 sec)</a:t>
             </a:r>
           </a:p>
           <a:p xmlns:a="http://schemas.openxmlformats.org/drawingml/2006/main">
@@ -1971,7 +1973,7 @@
           <a:lstStyle xmlns:a="http://schemas.openxmlformats.org/drawingml/2006/main"/>
           <a:p xmlns:a="http://schemas.openxmlformats.org/drawingml/2006/main">
             <a:r>
-              <a:t>RUN OF SHOW 0:30–1:15 (45 sec)</a:t>
+              <a:t>RUN OF SHOW 6:15–7:00 (45 sec)</a:t>
             </a:r>
           </a:p>
           <a:p xmlns:a="http://schemas.openxmlformats.org/drawingml/2006/main">
@@ -2074,7 +2076,7 @@
           <a:lstStyle xmlns:a="http://schemas.openxmlformats.org/drawingml/2006/main"/>
           <a:p xmlns:a="http://schemas.openxmlformats.org/drawingml/2006/main">
             <a:r>
-              <a:t>RUN OF SHOW 18:20–19:10 (50 sec)</a:t>
+              <a:t>RUN OF SHOW 20:05–20:55 (50 sec)</a:t>
             </a:r>
           </a:p>
           <a:p xmlns:a="http://schemas.openxmlformats.org/drawingml/2006/main">
@@ -2213,7 +2215,7 @@
           <a:lstStyle xmlns:a="http://schemas.openxmlformats.org/drawingml/2006/main"/>
           <a:p xmlns:a="http://schemas.openxmlformats.org/drawingml/2006/main">
             <a:r>
-              <a:t>RUN OF SHOW 19:10–19:55 (45 sec)</a:t>
+              <a:t>RUN OF SHOW 20:55–21:40 (45 sec)</a:t>
             </a:r>
           </a:p>
           <a:p xmlns:a="http://schemas.openxmlformats.org/drawingml/2006/main">
@@ -2392,7 +2394,7 @@
           <a:lstStyle xmlns:a="http://schemas.openxmlformats.org/drawingml/2006/main"/>
           <a:p xmlns:a="http://schemas.openxmlformats.org/drawingml/2006/main">
             <a:r>
-              <a:t>RUN OF SHOW 19:55–20:40 (45 sec)</a:t>
+              <a:t>RUN OF SHOW 21:40–22:25 (45 sec)</a:t>
             </a:r>
           </a:p>
           <a:p xmlns:a="http://schemas.openxmlformats.org/drawingml/2006/main">
@@ -2531,7 +2533,7 @@
           <a:lstStyle xmlns:a="http://schemas.openxmlformats.org/drawingml/2006/main"/>
           <a:p xmlns:a="http://schemas.openxmlformats.org/drawingml/2006/main">
             <a:r>
-              <a:t>RUN OF SHOW 20:40–21:35 (55 sec)</a:t>
+              <a:t>RUN OF SHOW 22:25–23:20 (55 sec)</a:t>
             </a:r>
           </a:p>
           <a:p xmlns:a="http://schemas.openxmlformats.org/drawingml/2006/main">
@@ -2645,7 +2647,7 @@
           <a:lstStyle xmlns:a="http://schemas.openxmlformats.org/drawingml/2006/main"/>
           <a:p xmlns:a="http://schemas.openxmlformats.org/drawingml/2006/main">
             <a:r>
-              <a:t>RUN OF SHOW 21:35–22:30 (55 sec)</a:t>
+              <a:t>RUN OF SHOW 23:20–24:15 (55 sec)</a:t>
             </a:r>
           </a:p>
           <a:p xmlns:a="http://schemas.openxmlformats.org/drawingml/2006/main">
@@ -2804,7 +2806,7 @@
           <a:p xmlns:a="http://schemas.openxmlformats.org/drawingml/2006/main"/>
           <a:p xmlns:a="http://schemas.openxmlformats.org/drawingml/2006/main">
             <a:r>
-              <a:t>Q&amp;A follows the 22-minute 30-second presentation and is not counted toward its target.</a:t>
+              <a:t>Q&amp;A follows the 24-minute 15-second presentation and is not counted toward its target.</a:t>
             </a:r>
           </a:p>
           <a:p xmlns:a="http://schemas.openxmlformats.org/drawingml/2006/main">
@@ -3543,7 +3545,7 @@
           <a:lstStyle xmlns:a="http://schemas.openxmlformats.org/drawingml/2006/main"/>
           <a:p xmlns:a="http://schemas.openxmlformats.org/drawingml/2006/main">
             <a:r>
-              <a:t>RUN OF SHOW 1:15–1:50 (35 sec)</a:t>
+              <a:t>RUN OF SHOW 7:00–7:35 (35 sec)</a:t>
             </a:r>
           </a:p>
           <a:p xmlns:a="http://schemas.openxmlformats.org/drawingml/2006/main">
@@ -3627,6 +3629,121 @@
   </p:cSld>
   <p:clrMapOvr>
     <a:masterClrMapping xmlns:a="http://schemas.openxmlformats.org/drawingml/2006/main"/>
+  </p:clrMapOvr>
+</p:notes>
+</file>
+
+<file path=ppt/notesSlides/notesSlide30.xml><?xml version="1.0" encoding="utf-8"?>
+<p:notes xmlns:a="http://schemas.openxmlformats.org/drawingml/2006/main" xmlns:p="http://schemas.openxmlformats.org/presentationml/2006/main" xmlns:r="http://schemas.openxmlformats.org/officeDocument/2006/relationships">
+  <p:cSld>
+    <p:spTree>
+      <p:nvGrpSpPr>
+        <p:cNvPr id="1" name=""/>
+        <p:cNvGrpSpPr/>
+        <p:nvPr/>
+      </p:nvGrpSpPr>
+      <p:grpSpPr>
+        <a:xfrm>
+          <a:off x="0" y="0"/>
+          <a:ext cx="0" cy="0"/>
+          <a:chOff x="0" y="0"/>
+          <a:chExt cx="0" cy="0"/>
+        </a:xfrm>
+      </p:grpSpPr>
+      <p:sp>
+        <p:nvSpPr>
+          <p:cNvPr id="2" name="Slide Image Placeholder 1"/>
+          <p:cNvSpPr>
+            <a:spLocks noGrp="1"/>
+          </p:cNvSpPr>
+          <p:nvPr>
+            <p:ph type="sldImg" idx="2"/>
+          </p:nvPr>
+        </p:nvSpPr>
+        <p:spPr/>
+      </p:sp>
+      <p:sp>
+        <p:nvSpPr>
+          <p:cNvPr id="3" name="Notes Placeholder 2"/>
+          <p:cNvSpPr>
+            <a:spLocks noGrp="1"/>
+          </p:cNvSpPr>
+          <p:nvPr>
+            <p:ph type="body" idx="3" sz="quarter"/>
+          </p:nvPr>
+        </p:nvSpPr>
+        <p:spPr/>
+        <p:txBody>
+          <a:bodyPr/>
+          <a:lstStyle/>
+          <a:p>
+            <a:r>
+              <a:t>RUN OF SHOW 0:30–1:30 (60 sec)</a:t>
+            </a:r>
+          </a:p>
+          <a:p>
+            <a:r>
+              <a:t>Andy | 60 seconds</a:t>
+            </a:r>
+          </a:p>
+          <a:p>
+            <a:r>
+              <a:t>CUES: A household / limited money / cost of leaving a job</a:t>
+            </a:r>
+          </a:p>
+          <a:p/>
+          <a:p>
+            <a:r>
+              <a:t>Say: “Imagine living in Detroit as the automobile industry expands. You need a place to live, food, heat, clothing, and a way to get to work. At $2.34 a day, six paid days would bring in $14.04 for 54 hours of work. Now imagine deciding whether you can afford to leave a difficult job.”</a:t>
+            </a:r>
+          </a:p>
+          <a:p/>
+          <a:p>
+            <a:r>
+              <a:t>Explain the example: “For our discussion only, we have invented a weekly household budget: $3 toward rent, $6 for groceries, and 60 cents for transportation. These are classroom assumptions, not researched Detroit averages. They leave $4.44 before many other expenses.” Do not call these figures historical prices or an adequate standard of living. The commute allowance is simply an invented total, not a verified streetcar fare. Rent of $3 weekly is not the same as $12 per calendar month.</a:t>
+            </a:r>
+          </a:p>
+          <a:p/>
+          <a:p>
+            <a:r>
+              <a:t>Daily-life scene: a worker’s day revolves around getting to a scheduled factory shift, repetitive production work, and meeting household needs. Household size, distance to work, other earners, and housing arrangements would change the budget. Avoid claiming every Detroit worker owned a house or had the same experience.</a:t>
+            </a:r>
+          </a:p>
+          <a:p/>
+          <a:p>
+            <a:r>
+              <a:t>RESEARCH LIMIT: Historical-source retrieval returned HTTP proxy 403 errors. No verified average Detroit house price, size, rent, grocery basket, or streetcar fare is available in the supplied materials. Do not present this as the requested historical cost-of-living survey. Replace the clearly marked fictional budget only when dated Detroit evidence is available. A house purchase price and size were deliberately omitted rather than invented.</a:t>
+            </a:r>
+          </a:p>
+          <a:p>
+            <a:r>
+              <a:t>WAGE SOURCE carried over: Matt Anderson, “Ford’s Five-Dollar Day,” The Henry Ford, https://www.thehenryford.org/collections/explore/articles/fords-five-dollar-day . Six-day income and weekly hours are arithmetic assumptions for this exercise.</a:t>
+            </a:r>
+          </a:p>
+          <a:p>
+            <a:r>
+              <a:t>TRANSITION: “Now you are the management team. Your employees need that income, but many still decide the job is not worth staying for.”</a:t>
+            </a:r>
+          </a:p>
+          <a:p/>
+        </p:txBody>
+      </p:sp>
+      <p:sp>
+        <p:nvSpPr>
+          <p:cNvPr id="4" name="Slide Number Placeholder 3"/>
+          <p:cNvSpPr>
+            <a:spLocks noGrp="1"/>
+          </p:cNvSpPr>
+          <p:nvPr>
+            <p:ph type="sldNum" idx="5" sz="quarter"/>
+          </p:nvPr>
+        </p:nvSpPr>
+        <p:spPr/>
+      </p:sp>
+    </p:spTree>
+  </p:cSld>
+  <p:clrMapOvr>
+    <a:masterClrMapping/>
   </p:clrMapOvr>
 </p:notes>
 </file>
@@ -3671,7 +3788,7 @@
           <a:lstStyle xmlns:a="http://schemas.openxmlformats.org/drawingml/2006/main"/>
           <a:p xmlns:a="http://schemas.openxmlformats.org/drawingml/2006/main">
             <a:r>
-              <a:t>RUN OF SHOW 1:50–2:45 (55 sec)</a:t>
+              <a:t>RUN OF SHOW 7:35–8:30 (55 sec)</a:t>
             </a:r>
           </a:p>
           <a:p xmlns:a="http://schemas.openxmlformats.org/drawingml/2006/main">
@@ -3810,7 +3927,7 @@
           <a:lstStyle xmlns:a="http://schemas.openxmlformats.org/drawingml/2006/main"/>
           <a:p xmlns:a="http://schemas.openxmlformats.org/drawingml/2006/main">
             <a:r>
-              <a:t>RUN OF SHOW 2:45–3:40 (55 sec)</a:t>
+              <a:t>RUN OF SHOW 8:30–9:25 (55 sec)</a:t>
             </a:r>
           </a:p>
           <a:p xmlns:a="http://schemas.openxmlformats.org/drawingml/2006/main">
@@ -3943,60 +4060,58 @@
           <a:lstStyle xmlns:a="http://schemas.openxmlformats.org/drawingml/2006/main"/>
           <a:p xmlns:a="http://schemas.openxmlformats.org/drawingml/2006/main">
             <a:r>
-              <a:t>RUN OF SHOW 3:40–6:40 (180 sec)</a:t>
-            </a:r>
-          </a:p>
-          <a:p xmlns:a="http://schemas.openxmlformats.org/drawingml/2006/main">
-            <a:r>
-              <a:t>Andy facilitates, Slade times and calls on teams | 180 seconds</a:t>
-            </a:r>
-          </a:p>
-          <a:p xmlns:a="http://schemas.openxmlformats.org/drawingml/2006/main">
-            <a:r>
-              <a:t>CUES: Roles / capacity / worker leaves / vote</a:t>
+              <a:t>RUN OF SHOW 1:30–5:00 (210 sec)</a:t>
+            </a:r>
+          </a:p>
+          <a:p xmlns:a="http://schemas.openxmlformats.org/drawingml/2006/main">
+            <a:r>
+              <a:t>Andy facilitates; Slade times and invites reports | 210 seconds</a:t>
+            </a:r>
+          </a:p>
+          <a:p xmlns:a="http://schemas.openxmlformats.org/drawingml/2006/main">
+            <a:r>
+              <a:t>CUES: Seven groups / two changes / why and cost / listen</a:t>
             </a:r>
           </a:p>
           <a:p xmlns:a="http://schemas.openxmlformats.org/drawingml/2006/main"/>
           <a:p xmlns:a="http://schemas.openxmlformats.org/drawingml/2006/main">
             <a:r>
-              <a:t>Before class: no handouts or props required. Ask students to work in neighboring groups of three. A pair can combine worker and finance roles. Students may write their answer on paper or a phone. Announce that all numbers are invented for the exercise, not Ford production records. Assume enough material, no defects, no transfer delays, and steady-state production after startup.</a:t>
-            </a:r>
-          </a:p>
-          <a:p xmlns:a="http://schemas.openxmlformats.org/drawingml/2006/main">
-            <a:r>
-              <a:t>0:00–0:20 Explain roles and the three choices. Operations argues for output, the worker for sustainable work, finance for total cost. Ask for a calculation and a reason everyone can accept.</a:t>
-            </a:r>
-          </a:p>
-          <a:p xmlns:a="http://schemas.openxmlformats.org/drawingml/2006/main">
-            <a:r>
-              <a:t>0:20–1:00 Teams discuss. Ask the worker to speak before the manager chooses.</a:t>
-            </a:r>
-          </a:p>
-          <a:p xmlns:a="http://schemas.openxmlformats.org/drawingml/2006/main">
-            <a:r>
-              <a:t>1:00–1:30 Announce the shock: one wheels worker quits. Under A or C, the station has no worker until reassignment or replacement. Under B, one remains. C promises no guaranteed retention result. Teams revise their decision and name the missing evidence they would want.</a:t>
-            </a:r>
-          </a:p>
-          <a:p xmlns:a="http://schemas.openxmlformats.org/drawingml/2006/main">
-            <a:r>
-              <a:t>1:30–2:30 Show-of-hands vote for A, B, or C. Call on two teams with different answers. Each has twenty seconds to give capacity, worker concern, and response to the shock.</a:t>
-            </a:r>
-          </a:p>
-          <a:p xmlns:a="http://schemas.openxmlformats.org/drawingml/2006/main">
-            <a:r>
-              <a:t>2:30–3:00 Compare assumptions. A speeds the wrong station. B adds capacity and coverage, but adds cost. C may improve staffing stability but leaves the physical bottleneck unchanged. Ask: what would convince you that higher wages pay for themselves?</a:t>
-            </a:r>
-          </a:p>
-          <a:p xmlns:a="http://schemas.openxmlformats.org/drawingml/2006/main">
-            <a:r>
-              <a:t>Advance to the answer slide after the reports, not during discussion.</a:t>
-            </a:r>
-          </a:p>
-          <a:p xmlns:a="http://schemas.openxmlformats.org/drawingml/2006/main">
-            <a:r>
-              <a:t>COURSE: Ch. 1 efficiency, Ch. 4 problem definition/group decisions, Ch. 8 specialization, Ch. 9 retention. Exercise created for this class.</a:t>
-            </a:r>
-          </a:p>
+              <a:t>0:00–0:30: “You manage this factory. The line makes production faster, but workers keep leaving. Your task is to keep workers while keeping the business operating. You may change more than one thing.” Arrange roughly 28 students into seven groups of four; neighboring students can remain seated.</a:t>
+            </a:r>
+          </a:p>
+          <a:p xmlns:a="http://schemas.openxmlformats.org/drawingml/2006/main">
+            <a:r>
+              <a:t>0:30–2:30: Groups agree on two changes, how they help retention, their likely costs, and a measure of success. Slade gives a 30-second warning. Do not reveal Ford’s answer or limit groups to a single choice. If a group is stuck, ask whether its plan changes pay, hours, safety, supervision, breaks, or the work itself. These are possible proposals, not claims of policies Ford implemented.</a:t>
+            </a:r>
+          </a:p>
+          <a:p xmlns:a="http://schemas.openxmlformats.org/drawingml/2006/main">
+            <a:r>
+              <a:t>2:30–3:30: Hear three groups for 20 seconds each. Slade invites volunteers; Andy briefly repeats the two changes. Acknowledge combined proposals without declaring a winner.</a:t>
+            </a:r>
+          </a:p>
+          <a:p xmlns:a="http://schemas.openxmlformats.org/drawingml/2006/main"/>
+          <a:p xmlns:a="http://schemas.openxmlformats.org/drawingml/2006/main">
+            <a:r>
+              <a:t>The situation is a simplified classroom scenario based on early Ford assembly work and turnover. General machinery hazards are context; do not invent accident rates or claim a specific undocumented injury occurred. $2.34 is dollars for a whole workday, not cents, an hourly rate, or a legal minimum wage. Set the management decision immediately before the January 1914 announcement.</a:t>
+            </a:r>
+          </a:p>
+          <a:p xmlns:a="http://schemas.openxmlformats.org/drawingml/2006/main"/>
+          <a:p xmlns:a="http://schemas.openxmlformats.org/drawingml/2006/main">
+            <a:r>
+              <a:t>Listen for costs of raises, lost production from shorter shifts, training costs, equipment or safety changes, and potential benefits from retention. Useful measures include quits, absences, injuries, quality, and recruitment/training effort. Do not imply higher wages guarantee retention or solve unsafe work.</a:t>
+            </a:r>
+          </a:p>
+          <a:p xmlns:a="http://schemas.openxmlformats.org/drawingml/2006/main">
+            <a:r>
+              <a:t>Sources retained from the deck: The Henry Ford biography [A] and “Ford’s Five-Dollar Day” [D]; full URLs in the reference slides. These source links were not newly verified online.</a:t>
+            </a:r>
+          </a:p>
+          <a:p xmlns:a="http://schemas.openxmlformats.org/drawingml/2006/main">
+            <a:r>
+              <a:t>TRANSITION: “Let’s compare your ideas with the changes Ford actually announced.”</a:t>
+            </a:r>
+          </a:p>
+          <a:p xmlns:a="http://schemas.openxmlformats.org/drawingml/2006/main"/>
         </p:txBody>
       </p:sp>
       <p:sp>
@@ -4064,45 +4179,59 @@
           <a:lstStyle xmlns:a="http://schemas.openxmlformats.org/drawingml/2006/main"/>
           <a:p xmlns:a="http://schemas.openxmlformats.org/drawingml/2006/main">
             <a:r>
-              <a:t>RUN OF SHOW 6:40–7:40 (60 sec)</a:t>
-            </a:r>
-          </a:p>
-          <a:p xmlns:a="http://schemas.openxmlformats.org/drawingml/2006/main">
-            <a:r>
-              <a:t>Andy | 60 seconds</a:t>
-            </a:r>
-          </a:p>
-          <a:p xmlns:a="http://schemas.openxmlformats.org/drawingml/2006/main">
-            <a:r>
-              <a:t>CUES: 60/20 / parallel capacity / evidence</a:t>
+              <a:t>RUN OF SHOW 5:00–6:15 (75 sec)</a:t>
+            </a:r>
+          </a:p>
+          <a:p xmlns:a="http://schemas.openxmlformats.org/drawingml/2006/main">
+            <a:r>
+              <a:t>Slade | 75 seconds</a:t>
+            </a:r>
+          </a:p>
+          <a:p xmlns:a="http://schemas.openxmlformats.org/drawingml/2006/main">
+            <a:r>
+              <a:t>CUES: January 5 / daily pay / hours / conditions / compare</a:t>
             </a:r>
           </a:p>
           <a:p xmlns:a="http://schemas.openxmlformats.org/drawingml/2006/main"/>
           <a:p xmlns:a="http://schemas.openxmlformats.org/drawingml/2006/main">
             <a:r>
-              <a:t>The original line can finish one unit every twenty seconds after startup, or three per minute. Total time through the stations is fifty seconds, which is different from the steady-state completion interval. Speeding frames alone produces waiting work.</a:t>
-            </a:r>
-          </a:p>
-          <a:p xmlns:a="http://schemas.openxmlformats.org/drawingml/2006/main">
-            <a:r>
-              <a:t>With two equivalent wheels stations operating in parallel, each worker handles three units per minute, for six combined. The other stations can each handle six, so the line can sustain six under our ideal assumptions. After one wheels worker leaves, output falls to three. No staffing arrangement guarantees this output in real operations.</a:t>
-            </a:r>
-          </a:p>
-          <a:p xmlns:a="http://schemas.openxmlformats.org/drawingml/2006/main">
-            <a:r>
-              <a:t>A higher wage changes a possible cause of staffing instability, not a machine or task time. We cannot calculate its financial return without the wage cost and an estimate of the reduction in quitting, training costs, and disruption. A strong team can defend B for capacity and resilience or C for retention, if it identifies the evidence needed. Give credit for reasoning rather than only a letter choice.</a:t>
-            </a:r>
-          </a:p>
-          <a:p xmlns:a="http://schemas.openxmlformats.org/drawingml/2006/main">
-            <a:r>
-              <a:t>This exercise models a tension in Ford's history without pretending to reproduce it. The next slides return to documented evidence.</a:t>
-            </a:r>
-          </a:p>
-          <a:p xmlns:a="http://schemas.openxmlformats.org/drawingml/2006/main">
-            <a:r>
-              <a:t>COURSE: Chapter 4 decision criteria and evaluation, Chapter 8 job design, Chapter 9 compensation and retention.</a:t>
-            </a:r>
-          </a:p>
+              <a:t>Say: “Ford chose a combination, just as your groups could. On January 5, 1914, Ford and James Couzens announced a five-dollar day and an eight-hour workday. Compare that with about $2.34 for nine hours.”</a:t>
+            </a:r>
+          </a:p>
+          <a:p xmlns:a="http://schemas.openxmlformats.org/drawingml/2006/main">
+            <a:r>
+              <a:t>“The daily package rose by $2.66—about 114 percent—while the workday became an hour shorter. That is $5 for the day, not per hour. And the original package combined ordinary wages with a conditional share of profits. It was not automatically available to everyone.”</a:t>
+            </a:r>
+          </a:p>
+          <a:p xmlns:a="http://schemas.openxmlformats.org/drawingml/2006/main"/>
+          <a:p xmlns:a="http://schemas.openxmlformats.org/drawingml/2006/main">
+            <a:r>
+              <a:t>Ask for one quick show of hands: “Who proposed both pay and hours?” Then: “Higher compensation could help attract and retain workers. But did it remove repetition, safety concerns, or lack of control over the work?” Take one brief answer if time allows. Do not imply that this pay announcement implemented every safety or job-design proposal students suggested.</a:t>
+            </a:r>
+          </a:p>
+          <a:p xmlns:a="http://schemas.openxmlformats.org/drawingml/2006/main"/>
+          <a:p xmlns:a="http://schemas.openxmlformats.org/drawingml/2006/main">
+            <a:r>
+              <a:t>The policy responded in part to staffing instability; avoid saying exhaustion was its only cause or that every departing worker left for the same reason. The eligibility rules and intrusive checks receive fuller treatment later. Do not confuse the 1914 eight-hour day with the later five-day workweek.</a:t>
+            </a:r>
+          </a:p>
+          <a:p xmlns:a="http://schemas.openxmlformats.org/drawingml/2006/main"/>
+          <a:p xmlns:a="http://schemas.openxmlformats.org/drawingml/2006/main">
+            <a:r>
+              <a:t>Arithmetic: (5 − 2.34)/2.34 × 100 = 113.675%, rounded to 114%. Hourly equivalents: 2.34/9 = $0.26; 5/8 = $0.625. Conditional daily compensation is the relevant historical comparison, not a universal unconditional base rate.</a:t>
+            </a:r>
+          </a:p>
+          <a:p xmlns:a="http://schemas.openxmlformats.org/drawingml/2006/main">
+            <a:r>
+              <a:t>SOURCE: [D] Matt Anderson, “Ford’s Five-Dollar Day,” The Henry Ford (2014), https://www.thehenryford.org/collections/explore/articles/fords-five-dollar-day . Retained from the supplied presentation; live retrieval was blocked.</a:t>
+            </a:r>
+          </a:p>
+          <a:p xmlns:a="http://schemas.openxmlformats.org/drawingml/2006/main">
+            <a:r>
+              <a:t>TRANSITION: “That decision makes more sense once we understand the production system Ford and his team built. Andy will explain how it worked and what it meant for the people doing the jobs.”</a:t>
+            </a:r>
+          </a:p>
+          <a:p xmlns:a="http://schemas.openxmlformats.org/drawingml/2006/main"/>
         </p:txBody>
       </p:sp>
       <p:sp>
@@ -4170,7 +4299,7 @@
           <a:lstStyle xmlns:a="http://schemas.openxmlformats.org/drawingml/2006/main"/>
           <a:p xmlns:a="http://schemas.openxmlformats.org/drawingml/2006/main">
             <a:r>
-              <a:t>RUN OF SHOW 7:40–8:25 (45 sec)</a:t>
+              <a:t>RUN OF SHOW 9:25–10:10 (45 sec)</a:t>
             </a:r>
           </a:p>
           <a:p xmlns:a="http://schemas.openxmlformats.org/drawingml/2006/main">
@@ -4304,7 +4433,7 @@
           <a:lstStyle xmlns:a="http://schemas.openxmlformats.org/drawingml/2006/main"/>
           <a:p xmlns:a="http://schemas.openxmlformats.org/drawingml/2006/main">
             <a:r>
-              <a:t>RUN OF SHOW 8:25–9:05 (40 sec)</a:t>
+              <a:t>RUN OF SHOW 10:10–10:50 (40 sec)</a:t>
             </a:r>
           </a:p>
           <a:p xmlns:a="http://schemas.openxmlformats.org/drawingml/2006/main">
@@ -5261,64 +5390,6 @@
           </a:p>
         </p:txBody>
       </p:sp>
-      <p:sp>
-        <p:nvSpPr>
-          <p:cNvPr id="6" name="Rectangle 5">
-            <a:extLst xmlns:a="http://schemas.openxmlformats.org/drawingml/2006/main">
-              <a:ext uri="{FF2B5EF4-FFF2-40B4-BE49-F238E27FC236}">
-                <a16:creationId xmlns:a16="http://schemas.microsoft.com/office/drawing/2014/main" id="{D3A978C2-9D89-4AD1-94C7-1829B315BB4A}"/>
-              </a:ext>
-            </a:extLst>
-          </p:cNvPr>
-          <p:cNvSpPr>
-            <a:spLocks xmlns:a="http://schemas.openxmlformats.org/drawingml/2006/main" noGrp="1"/>
-          </p:cNvSpPr>
-          <p:nvPr/>
-        </p:nvSpPr>
-        <p:spPr>
-          <a:xfrm xmlns:a="http://schemas.openxmlformats.org/drawingml/2006/main">
-            <a:off x="666750" y="6429375"/>
-            <a:ext cx="9525000" cy="209550"/>
-          </a:xfrm>
-          <a:prstGeom xmlns:a="http://schemas.openxmlformats.org/drawingml/2006/main" prst="rect">
-            <a:avLst/>
-          </a:prstGeom>
-          <a:noFill xmlns:a="http://schemas.openxmlformats.org/drawingml/2006/main"/>
-          <a:ln xmlns:a="http://schemas.openxmlformats.org/drawingml/2006/main" w="0">
-            <a:noFill/>
-          </a:ln>
-        </p:spPr>
-        <p:txBody>
-          <a:bodyPr xmlns:a="http://schemas.openxmlformats.org/drawingml/2006/main" lIns="0" tIns="0" rIns="0" bIns="0">
-            <a:noAutofit/>
-          </a:bodyPr>
-          <a:lstStyle xmlns:a="http://schemas.openxmlformats.org/drawingml/2006/main"/>
-          <a:p xmlns:a="http://schemas.openxmlformats.org/drawingml/2006/main">
-            <a:pPr>
-              <a:buNone/>
-              <a:defRPr sz="1125" b="0">
-                <a:solidFill>
-                  <a:srgbClr val="C2C9CB"/>
-                </a:solidFill>
-                <a:latin typeface="Arial"/>
-                <a:ea typeface="Arial"/>
-                <a:cs typeface="Arial"/>
-              </a:defRPr>
-            </a:pPr>
-            <a:r>
-              <a:rPr sz="1125" b="0">
-                <a:solidFill>
-                  <a:srgbClr val="C2C9CB"/>
-                </a:solidFill>
-                <a:latin typeface="Arial"/>
-                <a:ea typeface="Arial"/>
-                <a:cs typeface="Arial"/>
-              </a:rPr>
-              <a:t>[A] [G]</a:t>
-            </a:r>
-          </a:p>
-        </p:txBody>
-      </p:sp>
     </p:spTree>
     <p:extLst>
       <p:ext uri="{BB962C8B-B14F-4D97-AF65-F5344CB8AC3E}">
@@ -6025,7 +6096,7 @@
                 <a:ea typeface="Arial"/>
                 <a:cs typeface="Arial"/>
               </a:rPr>
-              <a:t>10</a:t>
+              <a:t>11</a:t>
             </a:r>
           </a:p>
         </p:txBody>
@@ -6139,14 +6210,14 @@
       </p:sp>
       <p:sp xmlns:a="http://schemas.openxmlformats.org/drawingml/2006/main">
         <p:nvSpPr>
-          <p:cNvPr id="4" name="TextBox 3"/>
+          <p:cNvPr id="5" name="TextBox 4"/>
           <p:cNvSpPr txBox="1"/>
           <p:nvPr/>
         </p:nvSpPr>
         <p:spPr>
           <a:xfrm>
-            <a:off x="640080" y="6437376"/>
-            <a:ext cx="10058400" cy="228600"/>
+            <a:off x="11384280" y="6419088"/>
+            <a:ext cx="457200" cy="274320"/>
           </a:xfrm>
           <a:prstGeom prst="rect">
             <a:avLst/>
@@ -6171,46 +6242,7 @@
               </a:defRPr>
             </a:pPr>
             <a:r>
-              <a:t>[O] The Henry Ford photograph, circa 1913 • [P] Ford &amp; Crowther, ch. VIII • [Q] NYT, 1916</a:t>
-            </a:r>
-          </a:p>
-        </p:txBody>
-      </p:sp>
-      <p:sp xmlns:a="http://schemas.openxmlformats.org/drawingml/2006/main">
-        <p:nvSpPr>
-          <p:cNvPr id="5" name="TextBox 4"/>
-          <p:cNvSpPr txBox="1"/>
-          <p:nvPr/>
-        </p:nvSpPr>
-        <p:spPr>
-          <a:xfrm>
-            <a:off x="11384280" y="6419088"/>
-            <a:ext cx="457200" cy="274320"/>
-          </a:xfrm>
-          <a:prstGeom prst="rect">
-            <a:avLst/>
-          </a:prstGeom>
-          <a:noFill/>
-        </p:spPr>
-        <p:txBody>
-          <a:bodyPr wrap="square" lIns="109728" rIns="109728" tIns="91440">
-            <a:spAutoFit/>
-          </a:bodyPr>
-          <a:lstStyle/>
-          <a:p>
-            <a:pPr>
-              <a:spcAft>
-                <a:spcPts val="1000"/>
-              </a:spcAft>
-              <a:defRPr sz="1000" b="0">
-                <a:solidFill>
-                  <a:srgbClr val="586A70"/>
-                </a:solidFill>
-                <a:latin typeface="Aptos"/>
-              </a:defRPr>
-            </a:pPr>
-            <a:r>
-              <a:t>11</a:t>
+              <a:t>12</a:t>
             </a:r>
           </a:p>
         </p:txBody>
@@ -6648,14 +6680,14 @@
       </p:sp>
       <p:sp xmlns:a="http://schemas.openxmlformats.org/drawingml/2006/main">
         <p:nvSpPr>
-          <p:cNvPr id="4" name="TextBox 3"/>
+          <p:cNvPr id="5" name="TextBox 4"/>
           <p:cNvSpPr txBox="1"/>
           <p:nvPr/>
         </p:nvSpPr>
         <p:spPr>
           <a:xfrm>
-            <a:off x="640080" y="6437376"/>
-            <a:ext cx="10058400" cy="228600"/>
+            <a:off x="11384280" y="6419088"/>
+            <a:ext cx="457200" cy="274320"/>
           </a:xfrm>
           <a:prstGeom prst="rect">
             <a:avLst/>
@@ -6680,46 +6712,7 @@
               </a:defRPr>
             </a:pPr>
             <a:r>
-              <a:t>[P] Ford &amp; Crowther, ch. VII–VIII • [R] The Henry Ford, Willow Run • [E] Sociological Department</a:t>
-            </a:r>
-          </a:p>
-        </p:txBody>
-      </p:sp>
-      <p:sp xmlns:a="http://schemas.openxmlformats.org/drawingml/2006/main">
-        <p:nvSpPr>
-          <p:cNvPr id="5" name="TextBox 4"/>
-          <p:cNvSpPr txBox="1"/>
-          <p:nvPr/>
-        </p:nvSpPr>
-        <p:spPr>
-          <a:xfrm>
-            <a:off x="11384280" y="6419088"/>
-            <a:ext cx="457200" cy="274320"/>
-          </a:xfrm>
-          <a:prstGeom prst="rect">
-            <a:avLst/>
-          </a:prstGeom>
-          <a:noFill/>
-        </p:spPr>
-        <p:txBody>
-          <a:bodyPr wrap="square" lIns="109728" rIns="109728" tIns="91440">
-            <a:spAutoFit/>
-          </a:bodyPr>
-          <a:lstStyle/>
-          <a:p>
-            <a:pPr>
-              <a:spcAft>
-                <a:spcPts val="1000"/>
-              </a:spcAft>
-              <a:defRPr sz="1000" b="0">
-                <a:solidFill>
-                  <a:srgbClr val="586A70"/>
-                </a:solidFill>
-                <a:latin typeface="Aptos"/>
-              </a:defRPr>
-            </a:pPr>
-            <a:r>
-              <a:t>12</a:t>
+              <a:t>13</a:t>
             </a:r>
           </a:p>
         </p:txBody>
@@ -7762,65 +7755,7 @@
                 <a:ea typeface="Arial"/>
                 <a:cs typeface="Arial"/>
               </a:rPr>
-              <a:t>13</a:t>
-            </a:r>
-          </a:p>
-        </p:txBody>
-      </p:sp>
-      <p:sp>
-        <p:nvSpPr>
-          <p:cNvPr id="9" name="Rectangle 8">
-            <a:extLst xmlns:a="http://schemas.openxmlformats.org/drawingml/2006/main">
-              <a:ext uri="{FF2B5EF4-FFF2-40B4-BE49-F238E27FC236}">
-                <a16:creationId xmlns:a16="http://schemas.microsoft.com/office/drawing/2014/main" id="{4ACD6C25-0C13-4EC1-9BDE-DCDBA02BE277}"/>
-              </a:ext>
-            </a:extLst>
-          </p:cNvPr>
-          <p:cNvSpPr>
-            <a:spLocks xmlns:a="http://schemas.openxmlformats.org/drawingml/2006/main" noGrp="1"/>
-          </p:cNvSpPr>
-          <p:nvPr/>
-        </p:nvSpPr>
-        <p:spPr>
-          <a:xfrm xmlns:a="http://schemas.openxmlformats.org/drawingml/2006/main">
-            <a:off x="666750" y="6429375"/>
-            <a:ext cx="9525000" cy="209550"/>
-          </a:xfrm>
-          <a:prstGeom xmlns:a="http://schemas.openxmlformats.org/drawingml/2006/main" prst="rect">
-            <a:avLst/>
-          </a:prstGeom>
-          <a:noFill xmlns:a="http://schemas.openxmlformats.org/drawingml/2006/main"/>
-          <a:ln xmlns:a="http://schemas.openxmlformats.org/drawingml/2006/main" w="0">
-            <a:noFill/>
-          </a:ln>
-        </p:spPr>
-        <p:txBody>
-          <a:bodyPr xmlns:a="http://schemas.openxmlformats.org/drawingml/2006/main" lIns="0" tIns="0" rIns="0" bIns="0">
-            <a:noAutofit/>
-          </a:bodyPr>
-          <a:lstStyle xmlns:a="http://schemas.openxmlformats.org/drawingml/2006/main"/>
-          <a:p xmlns:a="http://schemas.openxmlformats.org/drawingml/2006/main">
-            <a:pPr>
-              <a:buNone/>
-              <a:defRPr sz="1125" b="0">
-                <a:solidFill>
-                  <a:srgbClr val="55636A"/>
-                </a:solidFill>
-                <a:latin typeface="Arial"/>
-                <a:ea typeface="Arial"/>
-                <a:cs typeface="Arial"/>
-              </a:defRPr>
-            </a:pPr>
-            <a:r>
-              <a:rPr sz="1125" b="0">
-                <a:solidFill>
-                  <a:srgbClr val="55636A"/>
-                </a:solidFill>
-                <a:latin typeface="Arial"/>
-                <a:ea typeface="Arial"/>
-                <a:cs typeface="Arial"/>
-              </a:rPr>
-              <a:t>[A] [K]</a:t>
+              <a:t>14</a:t>
             </a:r>
           </a:p>
         </p:txBody>
@@ -8557,65 +8492,7 @@
                 <a:ea typeface="Arial"/>
                 <a:cs typeface="Arial"/>
               </a:rPr>
-              <a:t>14</a:t>
-            </a:r>
-          </a:p>
-        </p:txBody>
-      </p:sp>
-      <p:sp>
-        <p:nvSpPr>
-          <p:cNvPr id="9" name="Rectangle 8">
-            <a:extLst xmlns:a="http://schemas.openxmlformats.org/drawingml/2006/main">
-              <a:ext uri="{FF2B5EF4-FFF2-40B4-BE49-F238E27FC236}">
-                <a16:creationId xmlns:a16="http://schemas.microsoft.com/office/drawing/2014/main" id="{4354F531-0F19-406D-9854-6677119DF99A}"/>
-              </a:ext>
-            </a:extLst>
-          </p:cNvPr>
-          <p:cNvSpPr>
-            <a:spLocks xmlns:a="http://schemas.openxmlformats.org/drawingml/2006/main" noGrp="1"/>
-          </p:cNvSpPr>
-          <p:nvPr/>
-        </p:nvSpPr>
-        <p:spPr>
-          <a:xfrm xmlns:a="http://schemas.openxmlformats.org/drawingml/2006/main">
-            <a:off x="666750" y="6429375"/>
-            <a:ext cx="9525000" cy="209550"/>
-          </a:xfrm>
-          <a:prstGeom xmlns:a="http://schemas.openxmlformats.org/drawingml/2006/main" prst="rect">
-            <a:avLst/>
-          </a:prstGeom>
-          <a:noFill xmlns:a="http://schemas.openxmlformats.org/drawingml/2006/main"/>
-          <a:ln xmlns:a="http://schemas.openxmlformats.org/drawingml/2006/main" w="0">
-            <a:noFill/>
-          </a:ln>
-        </p:spPr>
-        <p:txBody>
-          <a:bodyPr xmlns:a="http://schemas.openxmlformats.org/drawingml/2006/main" lIns="0" tIns="0" rIns="0" bIns="0">
-            <a:noAutofit/>
-          </a:bodyPr>
-          <a:lstStyle xmlns:a="http://schemas.openxmlformats.org/drawingml/2006/main"/>
-          <a:p xmlns:a="http://schemas.openxmlformats.org/drawingml/2006/main">
-            <a:pPr>
-              <a:buNone/>
-              <a:defRPr sz="1125" b="0">
-                <a:solidFill>
-                  <a:srgbClr val="55636A"/>
-                </a:solidFill>
-                <a:latin typeface="Arial"/>
-                <a:ea typeface="Arial"/>
-                <a:cs typeface="Arial"/>
-              </a:defRPr>
-            </a:pPr>
-            <a:r>
-              <a:rPr sz="1125" b="0">
-                <a:solidFill>
-                  <a:srgbClr val="55636A"/>
-                </a:solidFill>
-                <a:latin typeface="Arial"/>
-                <a:ea typeface="Arial"/>
-                <a:cs typeface="Arial"/>
-              </a:rPr>
-              <a:t>[D]</a:t>
+              <a:t>15</a:t>
             </a:r>
           </a:p>
         </p:txBody>
@@ -8729,14 +8606,14 @@
       </p:sp>
       <p:sp xmlns:a="http://schemas.openxmlformats.org/drawingml/2006/main">
         <p:nvSpPr>
-          <p:cNvPr id="4" name="TextBox 3"/>
+          <p:cNvPr id="5" name="TextBox 4"/>
           <p:cNvSpPr txBox="1"/>
           <p:nvPr/>
         </p:nvSpPr>
         <p:spPr>
           <a:xfrm>
-            <a:off x="640080" y="6437376"/>
-            <a:ext cx="10058400" cy="228600"/>
+            <a:off x="11384280" y="6419088"/>
+            <a:ext cx="457200" cy="274320"/>
           </a:xfrm>
           <a:prstGeom prst="rect">
             <a:avLst/>
@@ -8761,46 +8638,7 @@
               </a:defRPr>
             </a:pPr>
             <a:r>
-              <a:t>[D] The Henry Ford, “Ford’s Five-Dollar Day” • [N] Detroit Historical Society, “Bennett, Harry” • [I] Battle of the Overpass</a:t>
-            </a:r>
-          </a:p>
-        </p:txBody>
-      </p:sp>
-      <p:sp xmlns:a="http://schemas.openxmlformats.org/drawingml/2006/main">
-        <p:nvSpPr>
-          <p:cNvPr id="5" name="TextBox 4"/>
-          <p:cNvSpPr txBox="1"/>
-          <p:nvPr/>
-        </p:nvSpPr>
-        <p:spPr>
-          <a:xfrm>
-            <a:off x="11384280" y="6419088"/>
-            <a:ext cx="457200" cy="274320"/>
-          </a:xfrm>
-          <a:prstGeom prst="rect">
-            <a:avLst/>
-          </a:prstGeom>
-          <a:noFill/>
-        </p:spPr>
-        <p:txBody>
-          <a:bodyPr wrap="square" lIns="109728" rIns="109728" tIns="91440">
-            <a:spAutoFit/>
-          </a:bodyPr>
-          <a:lstStyle/>
-          <a:p>
-            <a:pPr>
-              <a:spcAft>
-                <a:spcPts val="1000"/>
-              </a:spcAft>
-              <a:defRPr sz="1000" b="0">
-                <a:solidFill>
-                  <a:srgbClr val="586A70"/>
-                </a:solidFill>
-                <a:latin typeface="Aptos"/>
-              </a:defRPr>
-            </a:pPr>
-            <a:r>
-              <a:t>15</a:t>
+              <a:t>16</a:t>
             </a:r>
           </a:p>
         </p:txBody>
@@ -9921,65 +9759,7 @@
                 <a:ea typeface="Arial"/>
                 <a:cs typeface="Arial"/>
               </a:rPr>
-              <a:t>16</a:t>
-            </a:r>
-          </a:p>
-        </p:txBody>
-      </p:sp>
-      <p:sp>
-        <p:nvSpPr>
-          <p:cNvPr id="8" name="Rectangle 7">
-            <a:extLst xmlns:a="http://schemas.openxmlformats.org/drawingml/2006/main">
-              <a:ext uri="{FF2B5EF4-FFF2-40B4-BE49-F238E27FC236}">
-                <a16:creationId xmlns:a16="http://schemas.microsoft.com/office/drawing/2014/main" id="{11403689-98C0-4D75-A7BB-C903C6EC66E3}"/>
-              </a:ext>
-            </a:extLst>
-          </p:cNvPr>
-          <p:cNvSpPr>
-            <a:spLocks xmlns:a="http://schemas.openxmlformats.org/drawingml/2006/main" noGrp="1"/>
-          </p:cNvSpPr>
-          <p:nvPr/>
-        </p:nvSpPr>
-        <p:spPr>
-          <a:xfrm xmlns:a="http://schemas.openxmlformats.org/drawingml/2006/main">
-            <a:off x="666750" y="6429375"/>
-            <a:ext cx="9525000" cy="209550"/>
-          </a:xfrm>
-          <a:prstGeom xmlns:a="http://schemas.openxmlformats.org/drawingml/2006/main" prst="rect">
-            <a:avLst/>
-          </a:prstGeom>
-          <a:noFill xmlns:a="http://schemas.openxmlformats.org/drawingml/2006/main"/>
-          <a:ln xmlns:a="http://schemas.openxmlformats.org/drawingml/2006/main" w="0">
-            <a:noFill/>
-          </a:ln>
-        </p:spPr>
-        <p:txBody>
-          <a:bodyPr xmlns:a="http://schemas.openxmlformats.org/drawingml/2006/main" lIns="0" tIns="0" rIns="0" bIns="0">
-            <a:noAutofit/>
-          </a:bodyPr>
-          <a:lstStyle xmlns:a="http://schemas.openxmlformats.org/drawingml/2006/main"/>
-          <a:p xmlns:a="http://schemas.openxmlformats.org/drawingml/2006/main">
-            <a:pPr>
-              <a:buNone/>
-              <a:defRPr sz="1125" b="0">
-                <a:solidFill>
-                  <a:srgbClr val="55636A"/>
-                </a:solidFill>
-                <a:latin typeface="Arial"/>
-                <a:ea typeface="Arial"/>
-                <a:cs typeface="Arial"/>
-              </a:defRPr>
-            </a:pPr>
-            <a:r>
-              <a:rPr sz="1125" b="0">
-                <a:solidFill>
-                  <a:srgbClr val="55636A"/>
-                </a:solidFill>
-                <a:latin typeface="Arial"/>
-                <a:ea typeface="Arial"/>
-                <a:cs typeface="Arial"/>
-              </a:rPr>
-              <a:t>[E]</a:t>
+              <a:t>17</a:t>
             </a:r>
           </a:p>
         </p:txBody>
@@ -10356,65 +10136,7 @@
                 <a:ea typeface="Arial"/>
                 <a:cs typeface="Arial"/>
               </a:rPr>
-              <a:t>17</a:t>
-            </a:r>
-          </a:p>
-        </p:txBody>
-      </p:sp>
-      <p:sp>
-        <p:nvSpPr>
-          <p:cNvPr id="7" name="Rectangle 6">
-            <a:extLst xmlns:a="http://schemas.openxmlformats.org/drawingml/2006/main">
-              <a:ext uri="{FF2B5EF4-FFF2-40B4-BE49-F238E27FC236}">
-                <a16:creationId xmlns:a16="http://schemas.microsoft.com/office/drawing/2014/main" id="{39D1DC8E-ADAF-4FA8-B3E0-5E91081E99FC}"/>
-              </a:ext>
-            </a:extLst>
-          </p:cNvPr>
-          <p:cNvSpPr>
-            <a:spLocks xmlns:a="http://schemas.openxmlformats.org/drawingml/2006/main" noGrp="1"/>
-          </p:cNvSpPr>
-          <p:nvPr/>
-        </p:nvSpPr>
-        <p:spPr>
-          <a:xfrm xmlns:a="http://schemas.openxmlformats.org/drawingml/2006/main">
-            <a:off x="666750" y="6429375"/>
-            <a:ext cx="9525000" cy="209550"/>
-          </a:xfrm>
-          <a:prstGeom xmlns:a="http://schemas.openxmlformats.org/drawingml/2006/main" prst="rect">
-            <a:avLst/>
-          </a:prstGeom>
-          <a:noFill xmlns:a="http://schemas.openxmlformats.org/drawingml/2006/main"/>
-          <a:ln xmlns:a="http://schemas.openxmlformats.org/drawingml/2006/main" w="0">
-            <a:noFill/>
-          </a:ln>
-        </p:spPr>
-        <p:txBody>
-          <a:bodyPr xmlns:a="http://schemas.openxmlformats.org/drawingml/2006/main" lIns="0" tIns="0" rIns="0" bIns="0">
-            <a:noAutofit/>
-          </a:bodyPr>
-          <a:lstStyle xmlns:a="http://schemas.openxmlformats.org/drawingml/2006/main"/>
-          <a:p xmlns:a="http://schemas.openxmlformats.org/drawingml/2006/main">
-            <a:pPr>
-              <a:buNone/>
-              <a:defRPr sz="1125" b="0">
-                <a:solidFill>
-                  <a:srgbClr val="55636A"/>
-                </a:solidFill>
-                <a:latin typeface="Arial"/>
-                <a:ea typeface="Arial"/>
-                <a:cs typeface="Arial"/>
-              </a:defRPr>
-            </a:pPr>
-            <a:r>
-              <a:rPr sz="1125" b="0">
-                <a:solidFill>
-                  <a:srgbClr val="55636A"/>
-                </a:solidFill>
-                <a:latin typeface="Arial"/>
-                <a:ea typeface="Arial"/>
-                <a:cs typeface="Arial"/>
-              </a:rPr>
-              <a:t>[F]</a:t>
+              <a:t>18</a:t>
             </a:r>
           </a:p>
         </p:txBody>
@@ -11180,65 +10902,7 @@
                 <a:ea typeface="Arial"/>
                 <a:cs typeface="Arial"/>
               </a:rPr>
-              <a:t>18</a:t>
-            </a:r>
-          </a:p>
-        </p:txBody>
-      </p:sp>
-      <p:sp>
-        <p:nvSpPr>
-          <p:cNvPr id="9" name="Rectangle 8">
-            <a:extLst xmlns:a="http://schemas.openxmlformats.org/drawingml/2006/main">
-              <a:ext uri="{FF2B5EF4-FFF2-40B4-BE49-F238E27FC236}">
-                <a16:creationId xmlns:a16="http://schemas.microsoft.com/office/drawing/2014/main" id="{06A907BF-19AF-4D3B-8F81-263449B67D4B}"/>
-              </a:ext>
-            </a:extLst>
-          </p:cNvPr>
-          <p:cNvSpPr>
-            <a:spLocks xmlns:a="http://schemas.openxmlformats.org/drawingml/2006/main" noGrp="1"/>
-          </p:cNvSpPr>
-          <p:nvPr/>
-        </p:nvSpPr>
-        <p:spPr>
-          <a:xfrm xmlns:a="http://schemas.openxmlformats.org/drawingml/2006/main">
-            <a:off x="666750" y="6429375"/>
-            <a:ext cx="9525000" cy="209550"/>
-          </a:xfrm>
-          <a:prstGeom xmlns:a="http://schemas.openxmlformats.org/drawingml/2006/main" prst="rect">
-            <a:avLst/>
-          </a:prstGeom>
-          <a:noFill xmlns:a="http://schemas.openxmlformats.org/drawingml/2006/main"/>
-          <a:ln xmlns:a="http://schemas.openxmlformats.org/drawingml/2006/main" w="0">
-            <a:noFill/>
-          </a:ln>
-        </p:spPr>
-        <p:txBody>
-          <a:bodyPr xmlns:a="http://schemas.openxmlformats.org/drawingml/2006/main" lIns="0" tIns="0" rIns="0" bIns="0">
-            <a:noAutofit/>
-          </a:bodyPr>
-          <a:lstStyle xmlns:a="http://schemas.openxmlformats.org/drawingml/2006/main"/>
-          <a:p xmlns:a="http://schemas.openxmlformats.org/drawingml/2006/main">
-            <a:pPr>
-              <a:buNone/>
-              <a:defRPr sz="1125" b="0">
-                <a:solidFill>
-                  <a:srgbClr val="55636A"/>
-                </a:solidFill>
-                <a:latin typeface="Arial"/>
-                <a:ea typeface="Arial"/>
-                <a:cs typeface="Arial"/>
-              </a:defRPr>
-            </a:pPr>
-            <a:r>
-              <a:rPr sz="1125" b="0">
-                <a:solidFill>
-                  <a:srgbClr val="55636A"/>
-                </a:solidFill>
-                <a:latin typeface="Arial"/>
-                <a:ea typeface="Arial"/>
-                <a:cs typeface="Arial"/>
-              </a:rPr>
-              <a:t>[G]</a:t>
+              <a:t>19</a:t>
             </a:r>
           </a:p>
         </p:txBody>
@@ -11615,65 +11279,7 @@
                 <a:ea typeface="Arial"/>
                 <a:cs typeface="Arial"/>
               </a:rPr>
-              <a:t>19</a:t>
-            </a:r>
-          </a:p>
-        </p:txBody>
-      </p:sp>
-      <p:sp>
-        <p:nvSpPr>
-          <p:cNvPr id="7" name="Rectangle 6">
-            <a:extLst xmlns:a="http://schemas.openxmlformats.org/drawingml/2006/main">
-              <a:ext uri="{FF2B5EF4-FFF2-40B4-BE49-F238E27FC236}">
-                <a16:creationId xmlns:a16="http://schemas.microsoft.com/office/drawing/2014/main" id="{9B186427-3EBE-4C9A-A711-5E9BCC905B8F}"/>
-              </a:ext>
-            </a:extLst>
-          </p:cNvPr>
-          <p:cNvSpPr>
-            <a:spLocks xmlns:a="http://schemas.openxmlformats.org/drawingml/2006/main" noGrp="1"/>
-          </p:cNvSpPr>
-          <p:nvPr/>
-        </p:nvSpPr>
-        <p:spPr>
-          <a:xfrm xmlns:a="http://schemas.openxmlformats.org/drawingml/2006/main">
-            <a:off x="666750" y="6429375"/>
-            <a:ext cx="9525000" cy="209550"/>
-          </a:xfrm>
-          <a:prstGeom xmlns:a="http://schemas.openxmlformats.org/drawingml/2006/main" prst="rect">
-            <a:avLst/>
-          </a:prstGeom>
-          <a:noFill xmlns:a="http://schemas.openxmlformats.org/drawingml/2006/main"/>
-          <a:ln xmlns:a="http://schemas.openxmlformats.org/drawingml/2006/main" w="0">
-            <a:noFill/>
-          </a:ln>
-        </p:spPr>
-        <p:txBody>
-          <a:bodyPr xmlns:a="http://schemas.openxmlformats.org/drawingml/2006/main" lIns="0" tIns="0" rIns="0" bIns="0">
-            <a:noAutofit/>
-          </a:bodyPr>
-          <a:lstStyle xmlns:a="http://schemas.openxmlformats.org/drawingml/2006/main"/>
-          <a:p xmlns:a="http://schemas.openxmlformats.org/drawingml/2006/main">
-            <a:pPr>
-              <a:buNone/>
-              <a:defRPr sz="1125" b="0">
-                <a:solidFill>
-                  <a:srgbClr val="55636A"/>
-                </a:solidFill>
-                <a:latin typeface="Arial"/>
-                <a:ea typeface="Arial"/>
-                <a:cs typeface="Arial"/>
-              </a:defRPr>
-            </a:pPr>
-            <a:r>
-              <a:rPr sz="1125" b="0">
-                <a:solidFill>
-                  <a:srgbClr val="55636A"/>
-                </a:solidFill>
-                <a:latin typeface="Arial"/>
-                <a:ea typeface="Arial"/>
-                <a:cs typeface="Arial"/>
-              </a:rPr>
-              <a:t>[I]</a:t>
+              <a:t>20</a:t>
             </a:r>
           </a:p>
         </p:txBody>
@@ -12175,7 +11781,7 @@
                 <a:ea typeface="Arial"/>
                 <a:cs typeface="Arial"/>
               </a:rPr>
-              <a:t>02</a:t>
+              <a:t>05</a:t>
             </a:r>
           </a:p>
         </p:txBody>
@@ -12552,65 +12158,7 @@
                 <a:ea typeface="Arial"/>
                 <a:cs typeface="Arial"/>
               </a:rPr>
-              <a:t>20</a:t>
-            </a:r>
-          </a:p>
-        </p:txBody>
-      </p:sp>
-      <p:sp>
-        <p:nvSpPr>
-          <p:cNvPr id="7" name="Rectangle 6">
-            <a:extLst xmlns:a="http://schemas.openxmlformats.org/drawingml/2006/main">
-              <a:ext uri="{FF2B5EF4-FFF2-40B4-BE49-F238E27FC236}">
-                <a16:creationId xmlns:a16="http://schemas.microsoft.com/office/drawing/2014/main" id="{AD6D2BDB-5A75-4938-9DF9-EEE374E58D84}"/>
-              </a:ext>
-            </a:extLst>
-          </p:cNvPr>
-          <p:cNvSpPr>
-            <a:spLocks xmlns:a="http://schemas.openxmlformats.org/drawingml/2006/main" noGrp="1"/>
-          </p:cNvSpPr>
-          <p:nvPr/>
-        </p:nvSpPr>
-        <p:spPr>
-          <a:xfrm xmlns:a="http://schemas.openxmlformats.org/drawingml/2006/main">
-            <a:off x="666750" y="6429375"/>
-            <a:ext cx="9525000" cy="209550"/>
-          </a:xfrm>
-          <a:prstGeom xmlns:a="http://schemas.openxmlformats.org/drawingml/2006/main" prst="rect">
-            <a:avLst/>
-          </a:prstGeom>
-          <a:noFill xmlns:a="http://schemas.openxmlformats.org/drawingml/2006/main"/>
-          <a:ln xmlns:a="http://schemas.openxmlformats.org/drawingml/2006/main" w="0">
-            <a:noFill/>
-          </a:ln>
-        </p:spPr>
-        <p:txBody>
-          <a:bodyPr xmlns:a="http://schemas.openxmlformats.org/drawingml/2006/main" lIns="0" tIns="0" rIns="0" bIns="0">
-            <a:noAutofit/>
-          </a:bodyPr>
-          <a:lstStyle xmlns:a="http://schemas.openxmlformats.org/drawingml/2006/main"/>
-          <a:p xmlns:a="http://schemas.openxmlformats.org/drawingml/2006/main">
-            <a:pPr>
-              <a:buNone/>
-              <a:defRPr sz="1125" b="0">
-                <a:solidFill>
-                  <a:srgbClr val="C2C9CB"/>
-                </a:solidFill>
-                <a:latin typeface="Arial"/>
-                <a:ea typeface="Arial"/>
-                <a:cs typeface="Arial"/>
-              </a:defRPr>
-            </a:pPr>
-            <a:r>
-              <a:rPr sz="1125" b="0">
-                <a:solidFill>
-                  <a:srgbClr val="C2C9CB"/>
-                </a:solidFill>
-                <a:latin typeface="Arial"/>
-                <a:ea typeface="Arial"/>
-                <a:cs typeface="Arial"/>
-              </a:rPr>
-              <a:t>[H] [M]</a:t>
+              <a:t>21</a:t>
             </a:r>
           </a:p>
         </p:txBody>
@@ -13343,65 +12891,7 @@
                 <a:ea typeface="Arial"/>
                 <a:cs typeface="Arial"/>
               </a:rPr>
-              <a:t>21</a:t>
-            </a:r>
-          </a:p>
-        </p:txBody>
-      </p:sp>
-      <p:sp>
-        <p:nvSpPr>
-          <p:cNvPr id="8" name="Rectangle 7">
-            <a:extLst xmlns:a="http://schemas.openxmlformats.org/drawingml/2006/main">
-              <a:ext uri="{FF2B5EF4-FFF2-40B4-BE49-F238E27FC236}">
-                <a16:creationId xmlns:a16="http://schemas.microsoft.com/office/drawing/2014/main" id="{B5E2D795-017E-4BF7-BDB0-E843B95260B6}"/>
-              </a:ext>
-            </a:extLst>
-          </p:cNvPr>
-          <p:cNvSpPr>
-            <a:spLocks xmlns:a="http://schemas.openxmlformats.org/drawingml/2006/main" noGrp="1"/>
-          </p:cNvSpPr>
-          <p:nvPr/>
-        </p:nvSpPr>
-        <p:spPr>
-          <a:xfrm xmlns:a="http://schemas.openxmlformats.org/drawingml/2006/main">
-            <a:off x="666750" y="6429375"/>
-            <a:ext cx="9525000" cy="209550"/>
-          </a:xfrm>
-          <a:prstGeom xmlns:a="http://schemas.openxmlformats.org/drawingml/2006/main" prst="rect">
-            <a:avLst/>
-          </a:prstGeom>
-          <a:noFill xmlns:a="http://schemas.openxmlformats.org/drawingml/2006/main"/>
-          <a:ln xmlns:a="http://schemas.openxmlformats.org/drawingml/2006/main" w="0">
-            <a:noFill/>
-          </a:ln>
-        </p:spPr>
-        <p:txBody>
-          <a:bodyPr xmlns:a="http://schemas.openxmlformats.org/drawingml/2006/main" lIns="0" tIns="0" rIns="0" bIns="0">
-            <a:noAutofit/>
-          </a:bodyPr>
-          <a:lstStyle xmlns:a="http://schemas.openxmlformats.org/drawingml/2006/main"/>
-          <a:p xmlns:a="http://schemas.openxmlformats.org/drawingml/2006/main">
-            <a:pPr>
-              <a:buNone/>
-              <a:defRPr sz="1125" b="0">
-                <a:solidFill>
-                  <a:srgbClr val="55636A"/>
-                </a:solidFill>
-                <a:latin typeface="Arial"/>
-                <a:ea typeface="Arial"/>
-                <a:cs typeface="Arial"/>
-              </a:defRPr>
-            </a:pPr>
-            <a:r>
-              <a:rPr sz="1125" b="0">
-                <a:solidFill>
-                  <a:srgbClr val="55636A"/>
-                </a:solidFill>
-                <a:latin typeface="Arial"/>
-                <a:ea typeface="Arial"/>
-                <a:cs typeface="Arial"/>
-              </a:rPr>
-              <a:t>[C] [D] [E] [G] [H] [I]</a:t>
+              <a:t>22</a:t>
             </a:r>
           </a:p>
         </p:txBody>
@@ -14112,65 +13602,7 @@
                 <a:ea typeface="Arial"/>
                 <a:cs typeface="Arial"/>
               </a:rPr>
-              <a:t>22</a:t>
-            </a:r>
-          </a:p>
-        </p:txBody>
-      </p:sp>
-      <p:sp>
-        <p:nvSpPr>
-          <p:cNvPr id="8" name="Rectangle 7">
-            <a:extLst xmlns:a="http://schemas.openxmlformats.org/drawingml/2006/main">
-              <a:ext uri="{FF2B5EF4-FFF2-40B4-BE49-F238E27FC236}">
-                <a16:creationId xmlns:a16="http://schemas.microsoft.com/office/drawing/2014/main" id="{A39BA2D7-4C26-46A2-9BA1-EA4227EE4EC0}"/>
-              </a:ext>
-            </a:extLst>
-          </p:cNvPr>
-          <p:cNvSpPr>
-            <a:spLocks xmlns:a="http://schemas.openxmlformats.org/drawingml/2006/main" noGrp="1"/>
-          </p:cNvSpPr>
-          <p:nvPr/>
-        </p:nvSpPr>
-        <p:spPr>
-          <a:xfrm xmlns:a="http://schemas.openxmlformats.org/drawingml/2006/main">
-            <a:off x="666750" y="6429375"/>
-            <a:ext cx="9525000" cy="209550"/>
-          </a:xfrm>
-          <a:prstGeom xmlns:a="http://schemas.openxmlformats.org/drawingml/2006/main" prst="rect">
-            <a:avLst/>
-          </a:prstGeom>
-          <a:noFill xmlns:a="http://schemas.openxmlformats.org/drawingml/2006/main"/>
-          <a:ln xmlns:a="http://schemas.openxmlformats.org/drawingml/2006/main" w="0">
-            <a:noFill/>
-          </a:ln>
-        </p:spPr>
-        <p:txBody>
-          <a:bodyPr xmlns:a="http://schemas.openxmlformats.org/drawingml/2006/main" lIns="0" tIns="0" rIns="0" bIns="0">
-            <a:noAutofit/>
-          </a:bodyPr>
-          <a:lstStyle xmlns:a="http://schemas.openxmlformats.org/drawingml/2006/main"/>
-          <a:p xmlns:a="http://schemas.openxmlformats.org/drawingml/2006/main">
-            <a:pPr>
-              <a:buNone/>
-              <a:defRPr sz="1125" b="0">
-                <a:solidFill>
-                  <a:srgbClr val="55636A"/>
-                </a:solidFill>
-                <a:latin typeface="Arial"/>
-                <a:ea typeface="Arial"/>
-                <a:cs typeface="Arial"/>
-              </a:defRPr>
-            </a:pPr>
-            <a:r>
-              <a:rPr sz="1125" b="0">
-                <a:solidFill>
-                  <a:srgbClr val="55636A"/>
-                </a:solidFill>
-                <a:latin typeface="Arial"/>
-                <a:ea typeface="Arial"/>
-                <a:cs typeface="Arial"/>
-              </a:rPr>
-              <a:t>[G] [J]</a:t>
+              <a:t>23</a:t>
             </a:r>
           </a:p>
         </p:txBody>
@@ -15009,7 +14441,7 @@
                 <a:ea typeface="Arial"/>
                 <a:cs typeface="Arial"/>
               </a:rPr>
-              <a:t>23</a:t>
+              <a:t>24</a:t>
             </a:r>
           </a:p>
         </p:txBody>
@@ -15631,65 +15063,7 @@
                 <a:ea typeface="Arial"/>
                 <a:cs typeface="Arial"/>
               </a:rPr>
-              <a:t>24</a:t>
-            </a:r>
-          </a:p>
-        </p:txBody>
-      </p:sp>
-      <p:sp>
-        <p:nvSpPr>
-          <p:cNvPr id="6" name="Rectangle 5">
-            <a:extLst xmlns:a="http://schemas.openxmlformats.org/drawingml/2006/main">
-              <a:ext uri="{FF2B5EF4-FFF2-40B4-BE49-F238E27FC236}">
-                <a16:creationId xmlns:a16="http://schemas.microsoft.com/office/drawing/2014/main" id="{9BF32EA4-0199-4082-9B56-EDCCBB276DB6}"/>
-              </a:ext>
-            </a:extLst>
-          </p:cNvPr>
-          <p:cNvSpPr>
-            <a:spLocks xmlns:a="http://schemas.openxmlformats.org/drawingml/2006/main" noGrp="1"/>
-          </p:cNvSpPr>
-          <p:nvPr/>
-        </p:nvSpPr>
-        <p:spPr>
-          <a:xfrm xmlns:a="http://schemas.openxmlformats.org/drawingml/2006/main">
-            <a:off x="666750" y="6429375"/>
-            <a:ext cx="9525000" cy="209550"/>
-          </a:xfrm>
-          <a:prstGeom xmlns:a="http://schemas.openxmlformats.org/drawingml/2006/main" prst="rect">
-            <a:avLst/>
-          </a:prstGeom>
-          <a:noFill xmlns:a="http://schemas.openxmlformats.org/drawingml/2006/main"/>
-          <a:ln xmlns:a="http://schemas.openxmlformats.org/drawingml/2006/main" w="0">
-            <a:noFill/>
-          </a:ln>
-        </p:spPr>
-        <p:txBody>
-          <a:bodyPr xmlns:a="http://schemas.openxmlformats.org/drawingml/2006/main" lIns="0" tIns="0" rIns="0" bIns="0">
-            <a:noAutofit/>
-          </a:bodyPr>
-          <a:lstStyle xmlns:a="http://schemas.openxmlformats.org/drawingml/2006/main"/>
-          <a:p xmlns:a="http://schemas.openxmlformats.org/drawingml/2006/main">
-            <a:pPr>
-              <a:buNone/>
-              <a:defRPr sz="1125" b="0">
-                <a:solidFill>
-                  <a:srgbClr val="C2C9CB"/>
-                </a:solidFill>
-                <a:latin typeface="Arial"/>
-                <a:ea typeface="Arial"/>
-                <a:cs typeface="Arial"/>
-              </a:defRPr>
-            </a:pPr>
-            <a:r>
-              <a:rPr sz="1125" b="0">
-                <a:solidFill>
-                  <a:srgbClr val="C2C9CB"/>
-                </a:solidFill>
-                <a:latin typeface="Arial"/>
-                <a:ea typeface="Arial"/>
-                <a:cs typeface="Arial"/>
-              </a:rPr>
-              <a:t>[B] [D] [G] [H]</a:t>
+              <a:t>25</a:t>
             </a:r>
           </a:p>
         </p:txBody>
@@ -15984,65 +15358,7 @@
                 <a:ea typeface="Arial"/>
                 <a:cs typeface="Arial"/>
               </a:rPr>
-              <a:t>25</a:t>
-            </a:r>
-          </a:p>
-        </p:txBody>
-      </p:sp>
-      <p:sp>
-        <p:nvSpPr>
-          <p:cNvPr id="5" name="Rectangle 4">
-            <a:extLst xmlns:a="http://schemas.openxmlformats.org/drawingml/2006/main">
-              <a:ext uri="{FF2B5EF4-FFF2-40B4-BE49-F238E27FC236}">
-                <a16:creationId xmlns:a16="http://schemas.microsoft.com/office/drawing/2014/main" id="{B445B7F3-850A-4DEA-8C88-82C66E5DA3EA}"/>
-              </a:ext>
-            </a:extLst>
-          </p:cNvPr>
-          <p:cNvSpPr>
-            <a:spLocks xmlns:a="http://schemas.openxmlformats.org/drawingml/2006/main" noGrp="1"/>
-          </p:cNvSpPr>
-          <p:nvPr/>
-        </p:nvSpPr>
-        <p:spPr>
-          <a:xfrm xmlns:a="http://schemas.openxmlformats.org/drawingml/2006/main">
-            <a:off x="666750" y="6429375"/>
-            <a:ext cx="9525000" cy="209550"/>
-          </a:xfrm>
-          <a:prstGeom xmlns:a="http://schemas.openxmlformats.org/drawingml/2006/main" prst="rect">
-            <a:avLst/>
-          </a:prstGeom>
-          <a:noFill xmlns:a="http://schemas.openxmlformats.org/drawingml/2006/main"/>
-          <a:ln xmlns:a="http://schemas.openxmlformats.org/drawingml/2006/main" w="0">
-            <a:noFill/>
-          </a:ln>
-        </p:spPr>
-        <p:txBody>
-          <a:bodyPr xmlns:a="http://schemas.openxmlformats.org/drawingml/2006/main" lIns="0" tIns="0" rIns="0" bIns="0">
-            <a:noAutofit/>
-          </a:bodyPr>
-          <a:lstStyle xmlns:a="http://schemas.openxmlformats.org/drawingml/2006/main"/>
-          <a:p xmlns:a="http://schemas.openxmlformats.org/drawingml/2006/main">
-            <a:pPr>
-              <a:buNone/>
-              <a:defRPr sz="1125" b="0">
-                <a:solidFill>
-                  <a:srgbClr val="55636A"/>
-                </a:solidFill>
-                <a:latin typeface="Arial"/>
-                <a:ea typeface="Arial"/>
-                <a:cs typeface="Arial"/>
-              </a:defRPr>
-            </a:pPr>
-            <a:r>
-              <a:rPr sz="1125" b="0">
-                <a:solidFill>
-                  <a:srgbClr val="55636A"/>
-                </a:solidFill>
-                <a:latin typeface="Arial"/>
-                <a:ea typeface="Arial"/>
-                <a:cs typeface="Arial"/>
-              </a:rPr>
-              <a:t>[B] [D] [H]</a:t>
+              <a:t>26</a:t>
             </a:r>
           </a:p>
         </p:txBody>
@@ -18788,7 +18104,7 @@
                 <a:ea typeface="Arial"/>
                 <a:cs typeface="Arial"/>
               </a:rPr>
-              <a:t>28</a:t>
+              <a:t>29</a:t>
             </a:r>
           </a:p>
         </p:txBody>
@@ -19179,65 +18495,7 @@
                 <a:ea typeface="Arial"/>
                 <a:cs typeface="Arial"/>
               </a:rPr>
-              <a:t>29</a:t>
-            </a:r>
-          </a:p>
-        </p:txBody>
-      </p:sp>
-      <p:sp>
-        <p:nvSpPr>
-          <p:cNvPr id="6" name="Rectangle 5">
-            <a:extLst xmlns:a="http://schemas.openxmlformats.org/drawingml/2006/main">
-              <a:ext uri="{FF2B5EF4-FFF2-40B4-BE49-F238E27FC236}">
-                <a16:creationId xmlns:a16="http://schemas.microsoft.com/office/drawing/2014/main" id="{7239C693-E2B4-4E01-95BA-E4DF9FE38252}"/>
-              </a:ext>
-            </a:extLst>
-          </p:cNvPr>
-          <p:cNvSpPr>
-            <a:spLocks xmlns:a="http://schemas.openxmlformats.org/drawingml/2006/main" noGrp="1"/>
-          </p:cNvSpPr>
-          <p:nvPr/>
-        </p:nvSpPr>
-        <p:spPr>
-          <a:xfrm xmlns:a="http://schemas.openxmlformats.org/drawingml/2006/main">
-            <a:off x="666750" y="6429375"/>
-            <a:ext cx="9525000" cy="209550"/>
-          </a:xfrm>
-          <a:prstGeom xmlns:a="http://schemas.openxmlformats.org/drawingml/2006/main" prst="rect">
-            <a:avLst/>
-          </a:prstGeom>
-          <a:noFill xmlns:a="http://schemas.openxmlformats.org/drawingml/2006/main"/>
-          <a:ln xmlns:a="http://schemas.openxmlformats.org/drawingml/2006/main" w="0">
-            <a:noFill/>
-          </a:ln>
-        </p:spPr>
-        <p:txBody>
-          <a:bodyPr xmlns:a="http://schemas.openxmlformats.org/drawingml/2006/main" lIns="0" tIns="0" rIns="0" bIns="0">
-            <a:noAutofit/>
-          </a:bodyPr>
-          <a:lstStyle xmlns:a="http://schemas.openxmlformats.org/drawingml/2006/main"/>
-          <a:p xmlns:a="http://schemas.openxmlformats.org/drawingml/2006/main">
-            <a:pPr>
-              <a:buNone/>
-              <a:defRPr sz="1125" b="0">
-                <a:solidFill>
-                  <a:srgbClr val="55636A"/>
-                </a:solidFill>
-                <a:latin typeface="Arial"/>
-                <a:ea typeface="Arial"/>
-                <a:cs typeface="Arial"/>
-              </a:defRPr>
-            </a:pPr>
-            <a:r>
-              <a:rPr sz="1125" b="0">
-                <a:solidFill>
-                  <a:srgbClr val="55636A"/>
-                </a:solidFill>
-                <a:latin typeface="Arial"/>
-                <a:ea typeface="Arial"/>
-                <a:cs typeface="Arial"/>
-              </a:rPr>
-              <a:t>[K]</a:t>
+              <a:t>30</a:t>
             </a:r>
           </a:p>
         </p:txBody>
@@ -19714,65 +18972,7 @@
                 <a:ea typeface="Arial"/>
                 <a:cs typeface="Arial"/>
               </a:rPr>
-              <a:t>03</a:t>
-            </a:r>
-          </a:p>
-        </p:txBody>
-      </p:sp>
-      <p:sp>
-        <p:nvSpPr>
-          <p:cNvPr id="8" name="Rectangle 7">
-            <a:extLst xmlns:a="http://schemas.openxmlformats.org/drawingml/2006/main">
-              <a:ext uri="{FF2B5EF4-FFF2-40B4-BE49-F238E27FC236}">
-                <a16:creationId xmlns:a16="http://schemas.microsoft.com/office/drawing/2014/main" id="{DAF51726-4E9A-4003-A4B5-44B777118E03}"/>
-              </a:ext>
-            </a:extLst>
-          </p:cNvPr>
-          <p:cNvSpPr>
-            <a:spLocks xmlns:a="http://schemas.openxmlformats.org/drawingml/2006/main" noGrp="1"/>
-          </p:cNvSpPr>
-          <p:nvPr/>
-        </p:nvSpPr>
-        <p:spPr>
-          <a:xfrm xmlns:a="http://schemas.openxmlformats.org/drawingml/2006/main">
-            <a:off x="666750" y="6429375"/>
-            <a:ext cx="9525000" cy="209550"/>
-          </a:xfrm>
-          <a:prstGeom xmlns:a="http://schemas.openxmlformats.org/drawingml/2006/main" prst="rect">
-            <a:avLst/>
-          </a:prstGeom>
-          <a:noFill xmlns:a="http://schemas.openxmlformats.org/drawingml/2006/main"/>
-          <a:ln xmlns:a="http://schemas.openxmlformats.org/drawingml/2006/main" w="0">
-            <a:noFill/>
-          </a:ln>
-        </p:spPr>
-        <p:txBody>
-          <a:bodyPr xmlns:a="http://schemas.openxmlformats.org/drawingml/2006/main" lIns="0" tIns="0" rIns="0" bIns="0">
-            <a:noAutofit/>
-          </a:bodyPr>
-          <a:lstStyle xmlns:a="http://schemas.openxmlformats.org/drawingml/2006/main"/>
-          <a:p xmlns:a="http://schemas.openxmlformats.org/drawingml/2006/main">
-            <a:pPr>
-              <a:buNone/>
-              <a:defRPr sz="1125" b="0">
-                <a:solidFill>
-                  <a:srgbClr val="55636A"/>
-                </a:solidFill>
-                <a:latin typeface="Arial"/>
-                <a:ea typeface="Arial"/>
-                <a:cs typeface="Arial"/>
-              </a:defRPr>
-            </a:pPr>
-            <a:r>
-              <a:rPr sz="1125" b="0">
-                <a:solidFill>
-                  <a:srgbClr val="55636A"/>
-                </a:solidFill>
-                <a:latin typeface="Arial"/>
-                <a:ea typeface="Arial"/>
-                <a:cs typeface="Arial"/>
-              </a:rPr>
-              <a:t>[A] [C]</a:t>
+              <a:t>06</a:t>
             </a:r>
           </a:p>
         </p:txBody>
@@ -19784,6 +18984,592 @@
       </p:ext>
     </p:extLst>
   </p:cSld>
+</p:sld>
+</file>
+
+<file path=ppt/slides/slide30.xml><?xml version="1.0" encoding="utf-8"?>
+<p:sld xmlns:a="http://schemas.openxmlformats.org/drawingml/2006/main" xmlns:p="http://schemas.openxmlformats.org/presentationml/2006/main" xmlns:r="http://schemas.openxmlformats.org/officeDocument/2006/relationships">
+  <p:cSld>
+    <p:bg>
+      <p:bgPr>
+        <a:solidFill>
+          <a:srgbClr val="F3F1E9"/>
+        </a:solidFill>
+        <a:effectLst/>
+      </p:bgPr>
+    </p:bg>
+    <p:spTree>
+      <p:nvGrpSpPr>
+        <p:cNvPr id="1" name=""/>
+        <p:cNvGrpSpPr/>
+        <p:nvPr/>
+      </p:nvGrpSpPr>
+      <p:grpSpPr/>
+      <p:sp>
+        <p:nvSpPr>
+          <p:cNvPr id="2" name="TextBox 1"/>
+          <p:cNvSpPr txBox="1"/>
+          <p:nvPr/>
+        </p:nvSpPr>
+        <p:spPr>
+          <a:xfrm>
+            <a:off x="594360" y="411480"/>
+            <a:ext cx="10972800" cy="960120"/>
+          </a:xfrm>
+          <a:prstGeom prst="rect">
+            <a:avLst/>
+          </a:prstGeom>
+          <a:noFill/>
+        </p:spPr>
+        <p:txBody>
+          <a:bodyPr wrap="square" lIns="128016" rIns="128016" tIns="91440">
+            <a:spAutoFit/>
+          </a:bodyPr>
+          <a:lstStyle/>
+          <a:p>
+            <a:pPr>
+              <a:spcAft>
+                <a:spcPts val="800"/>
+              </a:spcAft>
+              <a:defRPr sz="3100" b="1">
+                <a:solidFill>
+                  <a:srgbClr val="17303B"/>
+                </a:solidFill>
+                <a:latin typeface="Aptos"/>
+              </a:defRPr>
+            </a:pPr>
+            <a:r>
+              <a:t>Detroit, 1914: make a paycheck last</a:t>
+            </a:r>
+          </a:p>
+        </p:txBody>
+      </p:sp>
+      <p:sp>
+        <p:nvSpPr>
+          <p:cNvPr id="3" name="TextBox 2"/>
+          <p:cNvSpPr txBox="1"/>
+          <p:nvPr/>
+        </p:nvSpPr>
+        <p:spPr>
+          <a:xfrm>
+            <a:off x="11384280" y="6419088"/>
+            <a:ext cx="457200" cy="274320"/>
+          </a:xfrm>
+          <a:prstGeom prst="rect">
+            <a:avLst/>
+          </a:prstGeom>
+          <a:noFill/>
+        </p:spPr>
+        <p:txBody>
+          <a:bodyPr wrap="square" lIns="128016" rIns="128016" tIns="91440">
+            <a:spAutoFit/>
+          </a:bodyPr>
+          <a:lstStyle/>
+          <a:p>
+            <a:pPr>
+              <a:spcAft>
+                <a:spcPts val="800"/>
+              </a:spcAft>
+              <a:defRPr sz="1000" b="0">
+                <a:solidFill>
+                  <a:srgbClr val="586A70"/>
+                </a:solidFill>
+                <a:latin typeface="Aptos"/>
+              </a:defRPr>
+            </a:pPr>
+            <a:r>
+              <a:t>02</a:t>
+            </a:r>
+          </a:p>
+        </p:txBody>
+      </p:sp>
+      <p:sp>
+        <p:nvSpPr>
+          <p:cNvPr id="4" name="TextBox 3"/>
+          <p:cNvSpPr txBox="1"/>
+          <p:nvPr/>
+        </p:nvSpPr>
+        <p:spPr>
+          <a:xfrm>
+            <a:off x="731520" y="1417320"/>
+            <a:ext cx="10698480" cy="685800"/>
+          </a:xfrm>
+          <a:prstGeom prst="rect">
+            <a:avLst/>
+          </a:prstGeom>
+          <a:noFill/>
+        </p:spPr>
+        <p:txBody>
+          <a:bodyPr wrap="square" lIns="128016" rIns="128016" tIns="91440">
+            <a:spAutoFit/>
+          </a:bodyPr>
+          <a:lstStyle/>
+          <a:p>
+            <a:pPr>
+              <a:spcAft>
+                <a:spcPts val="800"/>
+              </a:spcAft>
+              <a:defRPr sz="2400" b="0">
+                <a:solidFill>
+                  <a:srgbClr val="17303B"/>
+                </a:solidFill>
+                <a:latin typeface="Aptos"/>
+              </a:defRPr>
+            </a:pPr>
+            <a:r>
+              <a:t>Imagine a factory household: rent due, food to buy, and a commute to work.</a:t>
+            </a:r>
+          </a:p>
+        </p:txBody>
+      </p:sp>
+      <p:sp>
+        <p:nvSpPr>
+          <p:cNvPr id="5" name="TextBox 4"/>
+          <p:cNvSpPr txBox="1"/>
+          <p:nvPr/>
+        </p:nvSpPr>
+        <p:spPr>
+          <a:xfrm>
+            <a:off x="731520" y="2377440"/>
+            <a:ext cx="3566160" cy="457200"/>
+          </a:xfrm>
+          <a:prstGeom prst="rect">
+            <a:avLst/>
+          </a:prstGeom>
+          <a:noFill/>
+        </p:spPr>
+        <p:txBody>
+          <a:bodyPr wrap="square" lIns="128016" rIns="128016" tIns="91440">
+            <a:spAutoFit/>
+          </a:bodyPr>
+          <a:lstStyle/>
+          <a:p>
+            <a:pPr>
+              <a:spcAft>
+                <a:spcPts val="800"/>
+              </a:spcAft>
+              <a:defRPr sz="1800" b="1">
+                <a:solidFill>
+                  <a:srgbClr val="B65B2C"/>
+                </a:solidFill>
+                <a:latin typeface="Aptos"/>
+              </a:defRPr>
+            </a:pPr>
+            <a:r>
+              <a:t>INCOME</a:t>
+            </a:r>
+          </a:p>
+        </p:txBody>
+      </p:sp>
+      <p:sp>
+        <p:nvSpPr>
+          <p:cNvPr id="6" name="Rounded Rectangle 5"/>
+          <p:cNvSpPr/>
+          <p:nvPr/>
+        </p:nvSpPr>
+        <p:spPr>
+          <a:xfrm>
+            <a:off x="731520" y="2971800"/>
+            <a:ext cx="3566160" cy="1417320"/>
+          </a:xfrm>
+          <a:prstGeom prst="roundRect">
+            <a:avLst/>
+          </a:prstGeom>
+          <a:solidFill>
+            <a:srgbClr val="E7E1D3"/>
+          </a:solidFill>
+          <a:ln>
+            <a:noFill/>
+          </a:ln>
+        </p:spPr>
+        <p:style>
+          <a:lnRef idx="1">
+            <a:schemeClr val="accent1"/>
+          </a:lnRef>
+          <a:fillRef idx="3">
+            <a:schemeClr val="accent1"/>
+          </a:fillRef>
+          <a:effectRef idx="2">
+            <a:schemeClr val="accent1"/>
+          </a:effectRef>
+          <a:fontRef idx="minor">
+            <a:schemeClr val="lt1"/>
+          </a:fontRef>
+        </p:style>
+        <p:txBody>
+          <a:bodyPr rtlCol="0" anchor="ctr" wrap="square" lIns="128016" rIns="128016" tIns="91440"/>
+          <a:lstStyle/>
+          <a:p>
+            <a:pPr algn="ctr">
+              <a:spcAft>
+                <a:spcPts val="800"/>
+              </a:spcAft>
+              <a:defRPr sz="2300" b="0">
+                <a:solidFill>
+                  <a:srgbClr val="17303B"/>
+                </a:solidFill>
+                <a:latin typeface="Aptos"/>
+              </a:defRPr>
+            </a:pPr>
+            <a:r>
+              <a:t>$2.34 per workday</a:t>
+            </a:r>
+          </a:p>
+          <a:p>
+            <a:pPr>
+              <a:spcAft>
+                <a:spcPts val="800"/>
+              </a:spcAft>
+              <a:defRPr sz="2300" b="0">
+                <a:solidFill>
+                  <a:srgbClr val="17303B"/>
+                </a:solidFill>
+                <a:latin typeface="Aptos"/>
+              </a:defRPr>
+            </a:pPr>
+            <a:r>
+              <a:t>$14.04 per six-day week</a:t>
+            </a:r>
+          </a:p>
+        </p:txBody>
+      </p:sp>
+      <p:sp>
+        <p:nvSpPr>
+          <p:cNvPr id="7" name="TextBox 6"/>
+          <p:cNvSpPr txBox="1"/>
+          <p:nvPr/>
+        </p:nvSpPr>
+        <p:spPr>
+          <a:xfrm>
+            <a:off x="4526280" y="2377440"/>
+            <a:ext cx="3566160" cy="457200"/>
+          </a:xfrm>
+          <a:prstGeom prst="rect">
+            <a:avLst/>
+          </a:prstGeom>
+          <a:noFill/>
+        </p:spPr>
+        <p:txBody>
+          <a:bodyPr wrap="square" lIns="128016" rIns="128016" tIns="91440">
+            <a:spAutoFit/>
+          </a:bodyPr>
+          <a:lstStyle/>
+          <a:p>
+            <a:pPr>
+              <a:spcAft>
+                <a:spcPts val="800"/>
+              </a:spcAft>
+              <a:defRPr sz="1800" b="1">
+                <a:solidFill>
+                  <a:srgbClr val="B65B2C"/>
+                </a:solidFill>
+                <a:latin typeface="Aptos"/>
+              </a:defRPr>
+            </a:pPr>
+            <a:r>
+              <a:t>WORK</a:t>
+            </a:r>
+          </a:p>
+        </p:txBody>
+      </p:sp>
+      <p:sp>
+        <p:nvSpPr>
+          <p:cNvPr id="8" name="Rounded Rectangle 7"/>
+          <p:cNvSpPr/>
+          <p:nvPr/>
+        </p:nvSpPr>
+        <p:spPr>
+          <a:xfrm>
+            <a:off x="4526280" y="2971800"/>
+            <a:ext cx="3566160" cy="1417320"/>
+          </a:xfrm>
+          <a:prstGeom prst="roundRect">
+            <a:avLst/>
+          </a:prstGeom>
+          <a:solidFill>
+            <a:srgbClr val="E7E1D3"/>
+          </a:solidFill>
+          <a:ln>
+            <a:noFill/>
+          </a:ln>
+        </p:spPr>
+        <p:style>
+          <a:lnRef idx="1">
+            <a:schemeClr val="accent1"/>
+          </a:lnRef>
+          <a:fillRef idx="3">
+            <a:schemeClr val="accent1"/>
+          </a:fillRef>
+          <a:effectRef idx="2">
+            <a:schemeClr val="accent1"/>
+          </a:effectRef>
+          <a:fontRef idx="minor">
+            <a:schemeClr val="lt1"/>
+          </a:fontRef>
+        </p:style>
+        <p:txBody>
+          <a:bodyPr rtlCol="0" anchor="ctr" wrap="square" lIns="128016" rIns="128016" tIns="91440"/>
+          <a:lstStyle/>
+          <a:p>
+            <a:pPr algn="ctr">
+              <a:spcAft>
+                <a:spcPts val="800"/>
+              </a:spcAft>
+              <a:defRPr sz="2300" b="0">
+                <a:solidFill>
+                  <a:srgbClr val="17303B"/>
+                </a:solidFill>
+                <a:latin typeface="Aptos"/>
+              </a:defRPr>
+            </a:pPr>
+            <a:r>
+              <a:t>9 hours each day</a:t>
+            </a:r>
+          </a:p>
+          <a:p>
+            <a:pPr>
+              <a:spcAft>
+                <a:spcPts val="800"/>
+              </a:spcAft>
+              <a:defRPr sz="2300" b="0">
+                <a:solidFill>
+                  <a:srgbClr val="17303B"/>
+                </a:solidFill>
+                <a:latin typeface="Aptos"/>
+              </a:defRPr>
+            </a:pPr>
+            <a:r>
+              <a:t>54 hours per six-day week</a:t>
+            </a:r>
+          </a:p>
+        </p:txBody>
+      </p:sp>
+      <p:sp>
+        <p:nvSpPr>
+          <p:cNvPr id="9" name="TextBox 8"/>
+          <p:cNvSpPr txBox="1"/>
+          <p:nvPr/>
+        </p:nvSpPr>
+        <p:spPr>
+          <a:xfrm>
+            <a:off x="8321040" y="2377440"/>
+            <a:ext cx="3566160" cy="457200"/>
+          </a:xfrm>
+          <a:prstGeom prst="rect">
+            <a:avLst/>
+          </a:prstGeom>
+          <a:noFill/>
+        </p:spPr>
+        <p:txBody>
+          <a:bodyPr wrap="square" lIns="128016" rIns="128016" tIns="91440">
+            <a:spAutoFit/>
+          </a:bodyPr>
+          <a:lstStyle/>
+          <a:p>
+            <a:pPr>
+              <a:spcAft>
+                <a:spcPts val="800"/>
+              </a:spcAft>
+              <a:defRPr sz="1800" b="1">
+                <a:solidFill>
+                  <a:srgbClr val="B65B2C"/>
+                </a:solidFill>
+                <a:latin typeface="Aptos"/>
+              </a:defRPr>
+            </a:pPr>
+            <a:r>
+              <a:t>DAILY LIFE</a:t>
+            </a:r>
+          </a:p>
+        </p:txBody>
+      </p:sp>
+      <p:sp>
+        <p:nvSpPr>
+          <p:cNvPr id="10" name="Rounded Rectangle 9"/>
+          <p:cNvSpPr/>
+          <p:nvPr/>
+        </p:nvSpPr>
+        <p:spPr>
+          <a:xfrm>
+            <a:off x="8321040" y="2971800"/>
+            <a:ext cx="3566160" cy="1417320"/>
+          </a:xfrm>
+          <a:prstGeom prst="roundRect">
+            <a:avLst/>
+          </a:prstGeom>
+          <a:solidFill>
+            <a:srgbClr val="E7E1D3"/>
+          </a:solidFill>
+          <a:ln>
+            <a:noFill/>
+          </a:ln>
+        </p:spPr>
+        <p:style>
+          <a:lnRef idx="1">
+            <a:schemeClr val="accent1"/>
+          </a:lnRef>
+          <a:fillRef idx="3">
+            <a:schemeClr val="accent1"/>
+          </a:fillRef>
+          <a:effectRef idx="2">
+            <a:schemeClr val="accent1"/>
+          </a:effectRef>
+          <a:fontRef idx="minor">
+            <a:schemeClr val="lt1"/>
+          </a:fontRef>
+        </p:style>
+        <p:txBody>
+          <a:bodyPr rtlCol="0" anchor="ctr" wrap="square" lIns="128016" rIns="128016" tIns="91440"/>
+          <a:lstStyle/>
+          <a:p>
+            <a:pPr algn="ctr">
+              <a:spcAft>
+                <a:spcPts val="800"/>
+              </a:spcAft>
+              <a:defRPr sz="2300" b="0">
+                <a:solidFill>
+                  <a:srgbClr val="17303B"/>
+                </a:solidFill>
+                <a:latin typeface="Aptos"/>
+              </a:defRPr>
+            </a:pPr>
+            <a:r>
+              <a:t>Rent a home or rooms</a:t>
+            </a:r>
+          </a:p>
+          <a:p>
+            <a:pPr>
+              <a:spcAft>
+                <a:spcPts val="800"/>
+              </a:spcAft>
+              <a:defRPr sz="2300" b="0">
+                <a:solidFill>
+                  <a:srgbClr val="17303B"/>
+                </a:solidFill>
+                <a:latin typeface="Aptos"/>
+              </a:defRPr>
+            </a:pPr>
+            <a:r>
+              <a:t>Buy food, fuel, and transport</a:t>
+            </a:r>
+          </a:p>
+        </p:txBody>
+      </p:sp>
+      <p:sp>
+        <p:nvSpPr>
+          <p:cNvPr id="11" name="TextBox 10"/>
+          <p:cNvSpPr txBox="1"/>
+          <p:nvPr/>
+        </p:nvSpPr>
+        <p:spPr>
+          <a:xfrm>
+            <a:off x="777240" y="4709160"/>
+            <a:ext cx="10698480" cy="822960"/>
+          </a:xfrm>
+          <a:prstGeom prst="rect">
+            <a:avLst/>
+          </a:prstGeom>
+          <a:noFill/>
+        </p:spPr>
+        <p:txBody>
+          <a:bodyPr wrap="square" lIns="128016" rIns="128016" tIns="91440">
+            <a:spAutoFit/>
+          </a:bodyPr>
+          <a:lstStyle/>
+          <a:p>
+            <a:pPr>
+              <a:spcAft>
+                <a:spcPts val="800"/>
+              </a:spcAft>
+              <a:defRPr sz="2100" b="0">
+                <a:solidFill>
+                  <a:srgbClr val="17303B"/>
+                </a:solidFill>
+                <a:latin typeface="Aptos"/>
+              </a:defRPr>
+            </a:pPr>
+            <a:r>
+              <a:t>Example weekly budget: rent $3 + groceries $6 + transport $0.60 = $9.60.</a:t>
+            </a:r>
+          </a:p>
+          <a:p>
+            <a:pPr>
+              <a:spcAft>
+                <a:spcPts val="800"/>
+              </a:spcAft>
+              <a:defRPr sz="2100" b="0">
+                <a:solidFill>
+                  <a:srgbClr val="17303B"/>
+                </a:solidFill>
+                <a:latin typeface="Aptos"/>
+              </a:defRPr>
+            </a:pPr>
+            <a:r>
+              <a:t>That leaves $4.44 for fuel, clothing, illness, saving, and everything else.</a:t>
+            </a:r>
+          </a:p>
+        </p:txBody>
+      </p:sp>
+      <p:sp>
+        <p:nvSpPr>
+          <p:cNvPr id="12" name="TextBox 11"/>
+          <p:cNvSpPr txBox="1"/>
+          <p:nvPr/>
+        </p:nvSpPr>
+        <p:spPr>
+          <a:xfrm>
+            <a:off x="777240" y="5852160"/>
+            <a:ext cx="10607040" cy="594360"/>
+          </a:xfrm>
+          <a:prstGeom prst="rect">
+            <a:avLst/>
+          </a:prstGeom>
+          <a:noFill/>
+        </p:spPr>
+        <p:txBody>
+          <a:bodyPr wrap="square" lIns="128016" rIns="128016" tIns="91440">
+            <a:spAutoFit/>
+          </a:bodyPr>
+          <a:lstStyle/>
+          <a:p>
+            <a:pPr>
+              <a:spcAft>
+                <a:spcPts val="800"/>
+              </a:spcAft>
+              <a:defRPr sz="1400" b="0">
+                <a:solidFill>
+                  <a:srgbClr val="586A70"/>
+                </a:solidFill>
+                <a:latin typeface="Aptos"/>
+              </a:defRPr>
+            </a:pPr>
+            <a:r>
+              <a:t>Fictional budget for discussion—not measured 1914 Detroit prices.</a:t>
+            </a:r>
+          </a:p>
+          <a:p>
+            <a:pPr>
+              <a:spcAft>
+                <a:spcPts val="800"/>
+              </a:spcAft>
+              <a:defRPr sz="1400" b="0">
+                <a:solidFill>
+                  <a:srgbClr val="586A70"/>
+                </a:solidFill>
+                <a:latin typeface="Aptos"/>
+              </a:defRPr>
+            </a:pPr>
+            <a:r>
+              <a:t>Income assumes six paid days; this is not a complete household budget.</a:t>
+            </a:r>
+          </a:p>
+        </p:txBody>
+      </p:sp>
+    </p:spTree>
+  </p:cSld>
+  <p:clrMapOvr>
+    <a:masterClrMapping/>
+  </p:clrMapOvr>
 </p:sld>
 </file>
 
@@ -20525,65 +20311,7 @@
                 <a:ea typeface="Arial"/>
                 <a:cs typeface="Arial"/>
               </a:rPr>
-              <a:t>04</a:t>
-            </a:r>
-          </a:p>
-        </p:txBody>
-      </p:sp>
-      <p:sp>
-        <p:nvSpPr>
-          <p:cNvPr id="8" name="Rectangle 7">
-            <a:extLst xmlns:a="http://schemas.openxmlformats.org/drawingml/2006/main">
-              <a:ext uri="{FF2B5EF4-FFF2-40B4-BE49-F238E27FC236}">
-                <a16:creationId xmlns:a16="http://schemas.microsoft.com/office/drawing/2014/main" id="{B12372BA-5C17-424D-B7BE-BD8D3A6CC444}"/>
-              </a:ext>
-            </a:extLst>
-          </p:cNvPr>
-          <p:cNvSpPr>
-            <a:spLocks xmlns:a="http://schemas.openxmlformats.org/drawingml/2006/main" noGrp="1"/>
-          </p:cNvSpPr>
-          <p:nvPr/>
-        </p:nvSpPr>
-        <p:spPr>
-          <a:xfrm xmlns:a="http://schemas.openxmlformats.org/drawingml/2006/main">
-            <a:off x="666750" y="6429375"/>
-            <a:ext cx="9525000" cy="209550"/>
-          </a:xfrm>
-          <a:prstGeom xmlns:a="http://schemas.openxmlformats.org/drawingml/2006/main" prst="rect">
-            <a:avLst/>
-          </a:prstGeom>
-          <a:noFill xmlns:a="http://schemas.openxmlformats.org/drawingml/2006/main"/>
-          <a:ln xmlns:a="http://schemas.openxmlformats.org/drawingml/2006/main" w="0">
-            <a:noFill/>
-          </a:ln>
-        </p:spPr>
-        <p:txBody>
-          <a:bodyPr xmlns:a="http://schemas.openxmlformats.org/drawingml/2006/main" lIns="0" tIns="0" rIns="0" bIns="0">
-            <a:noAutofit/>
-          </a:bodyPr>
-          <a:lstStyle xmlns:a="http://schemas.openxmlformats.org/drawingml/2006/main"/>
-          <a:p xmlns:a="http://schemas.openxmlformats.org/drawingml/2006/main">
-            <a:pPr>
-              <a:buNone/>
-              <a:defRPr sz="1125" b="0">
-                <a:solidFill>
-                  <a:srgbClr val="55636A"/>
-                </a:solidFill>
-                <a:latin typeface="Arial"/>
-                <a:ea typeface="Arial"/>
-                <a:cs typeface="Arial"/>
-              </a:defRPr>
-            </a:pPr>
-            <a:r>
-              <a:rPr sz="1125" b="0">
-                <a:solidFill>
-                  <a:srgbClr val="55636A"/>
-                </a:solidFill>
-                <a:latin typeface="Arial"/>
-                <a:ea typeface="Arial"/>
-                <a:cs typeface="Arial"/>
-              </a:rPr>
-              <a:t>[L] [K]</a:t>
+              <a:t>07</a:t>
             </a:r>
           </a:p>
         </p:txBody>
@@ -21349,65 +21077,7 @@
                 <a:ea typeface="Arial"/>
                 <a:cs typeface="Arial"/>
               </a:rPr>
-              <a:t>05</a:t>
-            </a:r>
-          </a:p>
-        </p:txBody>
-      </p:sp>
-      <p:sp>
-        <p:nvSpPr>
-          <p:cNvPr id="9" name="Rectangle 8">
-            <a:extLst xmlns:a="http://schemas.openxmlformats.org/drawingml/2006/main">
-              <a:ext uri="{FF2B5EF4-FFF2-40B4-BE49-F238E27FC236}">
-                <a16:creationId xmlns:a16="http://schemas.microsoft.com/office/drawing/2014/main" id="{0D0D8B66-098C-4704-870D-8BB689B5FED1}"/>
-              </a:ext>
-            </a:extLst>
-          </p:cNvPr>
-          <p:cNvSpPr>
-            <a:spLocks xmlns:a="http://schemas.openxmlformats.org/drawingml/2006/main" noGrp="1"/>
-          </p:cNvSpPr>
-          <p:nvPr/>
-        </p:nvSpPr>
-        <p:spPr>
-          <a:xfrm xmlns:a="http://schemas.openxmlformats.org/drawingml/2006/main">
-            <a:off x="666750" y="6429375"/>
-            <a:ext cx="9525000" cy="209550"/>
-          </a:xfrm>
-          <a:prstGeom xmlns:a="http://schemas.openxmlformats.org/drawingml/2006/main" prst="rect">
-            <a:avLst/>
-          </a:prstGeom>
-          <a:noFill xmlns:a="http://schemas.openxmlformats.org/drawingml/2006/main"/>
-          <a:ln xmlns:a="http://schemas.openxmlformats.org/drawingml/2006/main" w="0">
-            <a:noFill/>
-          </a:ln>
-        </p:spPr>
-        <p:txBody>
-          <a:bodyPr xmlns:a="http://schemas.openxmlformats.org/drawingml/2006/main" lIns="0" tIns="0" rIns="0" bIns="0">
-            <a:noAutofit/>
-          </a:bodyPr>
-          <a:lstStyle xmlns:a="http://schemas.openxmlformats.org/drawingml/2006/main"/>
-          <a:p xmlns:a="http://schemas.openxmlformats.org/drawingml/2006/main">
-            <a:pPr>
-              <a:buNone/>
-              <a:defRPr sz="1125" b="0">
-                <a:solidFill>
-                  <a:srgbClr val="55636A"/>
-                </a:solidFill>
-                <a:latin typeface="Arial"/>
-                <a:ea typeface="Arial"/>
-                <a:cs typeface="Arial"/>
-              </a:defRPr>
-            </a:pPr>
-            <a:r>
-              <a:rPr sz="1125" b="0">
-                <a:solidFill>
-                  <a:srgbClr val="55636A"/>
-                </a:solidFill>
-                <a:latin typeface="Arial"/>
-                <a:ea typeface="Arial"/>
-                <a:cs typeface="Arial"/>
-              </a:rPr>
-              <a:t>[B] [K]</a:t>
+              <a:t>08</a:t>
             </a:r>
           </a:p>
         </p:txBody>
@@ -21450,7 +21120,7 @@
         <p:spPr>
           <a:xfrm>
             <a:off x="594360" y="411480"/>
-            <a:ext cx="10972800" cy="914400"/>
+            <a:ext cx="10972800" cy="960120"/>
           </a:xfrm>
           <a:prstGeom prst="rect">
             <a:avLst/>
@@ -21458,14 +21128,14 @@
           <a:noFill/>
         </p:spPr>
         <p:txBody>
-          <a:bodyPr wrap="square" lIns="109728" rIns="109728" tIns="91440">
+          <a:bodyPr wrap="square" lIns="128016" rIns="128016" tIns="91440">
             <a:spAutoFit/>
           </a:bodyPr>
           <a:lstStyle/>
           <a:p>
             <a:pPr>
               <a:spcAft>
-                <a:spcPts val="1000"/>
+                <a:spcPts val="800"/>
               </a:spcAft>
               <a:defRPr sz="3100" b="1">
                 <a:solidFill>
@@ -21475,7 +21145,7 @@
               </a:defRPr>
             </a:pPr>
             <a:r>
-              <a:t>Factory challenge: output or retention?</a:t>
+              <a:t>You manage the factory. Workers are leaving.</a:t>
             </a:r>
           </a:p>
         </p:txBody>
@@ -21483,84 +21153,6 @@
       <p:sp xmlns:a="http://schemas.openxmlformats.org/drawingml/2006/main">
         <p:nvSpPr>
           <p:cNvPr id="3" name="TextBox 2"/>
-          <p:cNvSpPr txBox="1"/>
-          <p:nvPr/>
-        </p:nvSpPr>
-        <p:spPr>
-          <a:xfrm>
-            <a:off x="640080" y="6080760"/>
-            <a:ext cx="10789920" cy="329184"/>
-          </a:xfrm>
-          <a:prstGeom prst="rect">
-            <a:avLst/>
-          </a:prstGeom>
-          <a:noFill/>
-        </p:spPr>
-        <p:txBody>
-          <a:bodyPr wrap="square" lIns="109728" rIns="109728" tIns="91440">
-            <a:spAutoFit/>
-          </a:bodyPr>
-          <a:lstStyle/>
-          <a:p>
-            <a:pPr>
-              <a:spcAft>
-                <a:spcPts val="1000"/>
-              </a:spcAft>
-              <a:defRPr sz="1200" b="0">
-                <a:solidFill>
-                  <a:srgbClr val="B65B2C"/>
-                </a:solidFill>
-                <a:latin typeface="Aptos"/>
-              </a:defRPr>
-            </a:pPr>
-            <a:r>
-              <a:t>3 minutes • Discuss → staffing shock → vote • Hypothetical classroom model</a:t>
-            </a:r>
-          </a:p>
-        </p:txBody>
-      </p:sp>
-      <p:sp xmlns:a="http://schemas.openxmlformats.org/drawingml/2006/main">
-        <p:nvSpPr>
-          <p:cNvPr id="4" name="TextBox 3"/>
-          <p:cNvSpPr txBox="1"/>
-          <p:nvPr/>
-        </p:nvSpPr>
-        <p:spPr>
-          <a:xfrm>
-            <a:off x="640080" y="6437376"/>
-            <a:ext cx="10058400" cy="228600"/>
-          </a:xfrm>
-          <a:prstGeom prst="rect">
-            <a:avLst/>
-          </a:prstGeom>
-          <a:noFill/>
-        </p:spPr>
-        <p:txBody>
-          <a:bodyPr wrap="square" lIns="109728" rIns="109728" tIns="91440">
-            <a:spAutoFit/>
-          </a:bodyPr>
-          <a:lstStyle/>
-          <a:p>
-            <a:pPr>
-              <a:spcAft>
-                <a:spcPts val="1000"/>
-              </a:spcAft>
-              <a:defRPr sz="1000" b="0">
-                <a:solidFill>
-                  <a:srgbClr val="586A70"/>
-                </a:solidFill>
-                <a:latin typeface="Aptos"/>
-              </a:defRPr>
-            </a:pPr>
-            <a:r>
-              <a:t>Ch. 1 efficiency • Ch. 4 decision-making • Ch. 8 job design • Ch. 9 retention</a:t>
-            </a:r>
-          </a:p>
-        </p:txBody>
-      </p:sp>
-      <p:sp xmlns:a="http://schemas.openxmlformats.org/drawingml/2006/main">
-        <p:nvSpPr>
-          <p:cNvPr id="5" name="TextBox 4"/>
           <p:cNvSpPr txBox="1"/>
           <p:nvPr/>
         </p:nvSpPr>
@@ -21575,14 +21167,14 @@
           <a:noFill/>
         </p:spPr>
         <p:txBody>
-          <a:bodyPr wrap="square" lIns="109728" rIns="109728" tIns="91440">
+          <a:bodyPr wrap="square" lIns="128016" rIns="128016" tIns="91440">
             <a:spAutoFit/>
           </a:bodyPr>
           <a:lstStyle/>
           <a:p>
             <a:pPr>
               <a:spcAft>
-                <a:spcPts val="1000"/>
+                <a:spcPts val="800"/>
               </a:spcAft>
               <a:defRPr sz="1000" b="0">
                 <a:solidFill>
@@ -21592,93 +21184,21 @@
               </a:defRPr>
             </a:pPr>
             <a:r>
-              <a:t>06</a:t>
+              <a:t>03</a:t>
             </a:r>
           </a:p>
         </p:txBody>
       </p:sp>
       <p:sp xmlns:a="http://schemas.openxmlformats.org/drawingml/2006/main">
         <p:nvSpPr>
-          <p:cNvPr id="6" name="Rounded Rectangle 5"/>
-          <p:cNvSpPr/>
+          <p:cNvPr id="4" name="TextBox 3"/>
+          <p:cNvSpPr txBox="1"/>
           <p:nvPr/>
         </p:nvSpPr>
         <p:spPr>
           <a:xfrm>
-            <a:off x="731520" y="1508760"/>
-            <a:ext cx="2331720" cy="1051560"/>
-          </a:xfrm>
-          <a:prstGeom prst="roundRect">
-            <a:avLst/>
-          </a:prstGeom>
-          <a:solidFill>
-            <a:srgbClr val="17303B"/>
-          </a:solidFill>
-          <a:ln>
-            <a:noFill/>
-          </a:ln>
-        </p:spPr>
-        <p:style>
-          <a:lnRef idx="1">
-            <a:schemeClr val="accent1"/>
-          </a:lnRef>
-          <a:fillRef idx="3">
-            <a:schemeClr val="accent1"/>
-          </a:fillRef>
-          <a:effectRef idx="2">
-            <a:schemeClr val="accent1"/>
-          </a:effectRef>
-          <a:fontRef idx="minor">
-            <a:schemeClr val="lt1"/>
-          </a:fontRef>
-        </p:style>
-        <p:txBody>
-          <a:bodyPr rtlCol="0" anchor="ctr" wrap="square" lIns="109728" rIns="109728" tIns="91440"/>
-          <a:lstStyle/>
-          <a:p>
-            <a:pPr algn="ctr">
-              <a:spcAft>
-                <a:spcPts val="1000"/>
-              </a:spcAft>
-              <a:defRPr sz="2300" b="1">
-                <a:solidFill>
-                  <a:srgbClr val="FFFFFF"/>
-                </a:solidFill>
-                <a:latin typeface="Aptos"/>
-              </a:defRPr>
-            </a:pPr>
-            <a:r>
-              <a:t>FRAME</a:t>
-            </a:r>
-          </a:p>
-          <a:p>
-            <a:pPr>
-              <a:spcAft>
-                <a:spcPts val="1000"/>
-              </a:spcAft>
-              <a:defRPr sz="2300" b="1">
-                <a:solidFill>
-                  <a:srgbClr val="FFFFFF"/>
-                </a:solidFill>
-                <a:latin typeface="Aptos"/>
-              </a:defRPr>
-            </a:pPr>
-            <a:r>
-              <a:t>10 sec</a:t>
-            </a:r>
-          </a:p>
-        </p:txBody>
-      </p:sp>
-      <p:sp xmlns:a="http://schemas.openxmlformats.org/drawingml/2006/main">
-        <p:nvSpPr>
-          <p:cNvPr id="7" name="TextBox 6"/>
-          <p:cNvSpPr txBox="1"/>
-          <p:nvPr/>
-        </p:nvSpPr>
-        <p:spPr>
-          <a:xfrm>
-            <a:off x="3090672" y="1764792"/>
-            <a:ext cx="411480" cy="548640"/>
+            <a:off x="777240" y="1508760"/>
+            <a:ext cx="10652760" cy="1371600"/>
           </a:xfrm>
           <a:prstGeom prst="rect">
             <a:avLst/>
@@ -21686,110 +21206,70 @@
           <a:noFill/>
         </p:spPr>
         <p:txBody>
-          <a:bodyPr wrap="square" lIns="109728" rIns="109728" tIns="91440">
+          <a:bodyPr wrap="square" lIns="128016" rIns="128016" tIns="91440">
             <a:spAutoFit/>
           </a:bodyPr>
           <a:lstStyle/>
           <a:p>
             <a:pPr>
               <a:spcAft>
-                <a:spcPts val="1000"/>
+                <a:spcPts val="800"/>
               </a:spcAft>
-              <a:defRPr sz="2300" b="0">
-                <a:solidFill>
-                  <a:srgbClr val="B65B2C"/>
+              <a:defRPr sz="2400" b="0">
+                <a:solidFill>
+                  <a:srgbClr val="17303B"/>
                 </a:solidFill>
                 <a:latin typeface="Aptos"/>
               </a:defRPr>
             </a:pPr>
             <a:r>
-              <a:t>→</a:t>
-            </a:r>
-          </a:p>
-        </p:txBody>
-      </p:sp>
-      <p:sp xmlns:a="http://schemas.openxmlformats.org/drawingml/2006/main">
-        <p:nvSpPr>
-          <p:cNvPr id="8" name="Rounded Rectangle 7"/>
-          <p:cNvSpPr/>
-          <p:nvPr/>
-        </p:nvSpPr>
-        <p:spPr>
-          <a:xfrm>
-            <a:off x="3584448" y="1508760"/>
-            <a:ext cx="2331720" cy="1051560"/>
-          </a:xfrm>
-          <a:prstGeom prst="roundRect">
-            <a:avLst/>
-          </a:prstGeom>
-          <a:solidFill>
-            <a:srgbClr val="B65B2C"/>
-          </a:solidFill>
-          <a:ln>
-            <a:noFill/>
-          </a:ln>
-        </p:spPr>
-        <p:style>
-          <a:lnRef idx="1">
-            <a:schemeClr val="accent1"/>
-          </a:lnRef>
-          <a:fillRef idx="3">
-            <a:schemeClr val="accent1"/>
-          </a:fillRef>
-          <a:effectRef idx="2">
-            <a:schemeClr val="accent1"/>
-          </a:effectRef>
-          <a:fontRef idx="minor">
-            <a:schemeClr val="lt1"/>
-          </a:fontRef>
-        </p:style>
-        <p:txBody>
-          <a:bodyPr rtlCol="0" anchor="ctr" wrap="square" lIns="109728" rIns="109728" tIns="91440"/>
-          <a:lstStyle/>
-          <a:p>
-            <a:pPr algn="ctr">
-              <a:spcAft>
-                <a:spcPts val="1000"/>
-              </a:spcAft>
-              <a:defRPr sz="2300" b="1">
-                <a:solidFill>
-                  <a:srgbClr val="FFFFFF"/>
-                </a:solidFill>
-                <a:latin typeface="Aptos"/>
-              </a:defRPr>
-            </a:pPr>
-            <a:r>
-              <a:t>WHEELS</a:t>
+              <a:t>Your employees work nine-hour days for about $2.34 per day.</a:t>
             </a:r>
           </a:p>
           <a:p>
             <a:pPr>
               <a:spcAft>
-                <a:spcPts val="1000"/>
+                <a:spcPts val="800"/>
               </a:spcAft>
-              <a:defRPr sz="2300" b="1">
-                <a:solidFill>
-                  <a:srgbClr val="FFFFFF"/>
+              <a:defRPr sz="2400" b="0">
+                <a:solidFill>
+                  <a:srgbClr val="17303B"/>
                 </a:solidFill>
                 <a:latin typeface="Aptos"/>
               </a:defRPr>
             </a:pPr>
             <a:r>
-              <a:t>20 sec</a:t>
+              <a:t>The work is repetitive, physically demanding, and paced by the line.</a:t>
+            </a:r>
+          </a:p>
+          <a:p>
+            <a:pPr>
+              <a:spcAft>
+                <a:spcPts val="800"/>
+              </a:spcAft>
+              <a:defRPr sz="2400" b="0">
+                <a:solidFill>
+                  <a:srgbClr val="17303B"/>
+                </a:solidFill>
+                <a:latin typeface="Aptos"/>
+              </a:defRPr>
+            </a:pPr>
+            <a:r>
+              <a:t>Moving machinery creates safety risks. Workers are quitting.</a:t>
             </a:r>
           </a:p>
         </p:txBody>
       </p:sp>
       <p:sp xmlns:a="http://schemas.openxmlformats.org/drawingml/2006/main">
         <p:nvSpPr>
-          <p:cNvPr id="9" name="TextBox 8"/>
+          <p:cNvPr id="5" name="TextBox 4"/>
           <p:cNvSpPr txBox="1"/>
           <p:nvPr/>
         </p:nvSpPr>
         <p:spPr>
           <a:xfrm>
-            <a:off x="5943600" y="1764792"/>
-            <a:ext cx="411480" cy="548640"/>
+            <a:off x="777240" y="3063240"/>
+            <a:ext cx="10652760" cy="640080"/>
           </a:xfrm>
           <a:prstGeom prst="rect">
             <a:avLst/>
@@ -21797,16 +21277,16 @@
           <a:noFill/>
         </p:spPr>
         <p:txBody>
-          <a:bodyPr wrap="square" lIns="109728" rIns="109728" tIns="91440">
+          <a:bodyPr wrap="square" lIns="128016" rIns="128016" tIns="91440">
             <a:spAutoFit/>
           </a:bodyPr>
           <a:lstStyle/>
           <a:p>
             <a:pPr>
               <a:spcAft>
-                <a:spcPts val="1000"/>
+                <a:spcPts val="800"/>
               </a:spcAft>
-              <a:defRPr sz="2300" b="0">
+              <a:defRPr sz="2300" b="1">
                 <a:solidFill>
                   <a:srgbClr val="B65B2C"/>
                 </a:solidFill>
@@ -21814,243 +21294,21 @@
               </a:defRPr>
             </a:pPr>
             <a:r>
-              <a:t>→</a:t>
+              <a:t>Every departure means recruiting and training another replacement.</a:t>
             </a:r>
           </a:p>
         </p:txBody>
       </p:sp>
       <p:sp xmlns:a="http://schemas.openxmlformats.org/drawingml/2006/main">
         <p:nvSpPr>
-          <p:cNvPr id="10" name="Rounded Rectangle 9"/>
+          <p:cNvPr id="6" name="Rounded Rectangle 5"/>
           <p:cNvSpPr/>
           <p:nvPr/>
         </p:nvSpPr>
         <p:spPr>
           <a:xfrm>
-            <a:off x="6437376" y="1508760"/>
-            <a:ext cx="2331720" cy="1051560"/>
-          </a:xfrm>
-          <a:prstGeom prst="roundRect">
-            <a:avLst/>
-          </a:prstGeom>
-          <a:solidFill>
-            <a:srgbClr val="17303B"/>
-          </a:solidFill>
-          <a:ln>
-            <a:noFill/>
-          </a:ln>
-        </p:spPr>
-        <p:style>
-          <a:lnRef idx="1">
-            <a:schemeClr val="accent1"/>
-          </a:lnRef>
-          <a:fillRef idx="3">
-            <a:schemeClr val="accent1"/>
-          </a:fillRef>
-          <a:effectRef idx="2">
-            <a:schemeClr val="accent1"/>
-          </a:effectRef>
-          <a:fontRef idx="minor">
-            <a:schemeClr val="lt1"/>
-          </a:fontRef>
-        </p:style>
-        <p:txBody>
-          <a:bodyPr rtlCol="0" anchor="ctr" wrap="square" lIns="109728" rIns="109728" tIns="91440"/>
-          <a:lstStyle/>
-          <a:p>
-            <a:pPr algn="ctr">
-              <a:spcAft>
-                <a:spcPts val="1000"/>
-              </a:spcAft>
-              <a:defRPr sz="2300" b="1">
-                <a:solidFill>
-                  <a:srgbClr val="FFFFFF"/>
-                </a:solidFill>
-                <a:latin typeface="Aptos"/>
-              </a:defRPr>
-            </a:pPr>
-            <a:r>
-              <a:t>ENGINE</a:t>
-            </a:r>
-          </a:p>
-          <a:p>
-            <a:pPr>
-              <a:spcAft>
-                <a:spcPts val="1000"/>
-              </a:spcAft>
-              <a:defRPr sz="2300" b="1">
-                <a:solidFill>
-                  <a:srgbClr val="FFFFFF"/>
-                </a:solidFill>
-                <a:latin typeface="Aptos"/>
-              </a:defRPr>
-            </a:pPr>
-            <a:r>
-              <a:t>10 sec</a:t>
-            </a:r>
-          </a:p>
-        </p:txBody>
-      </p:sp>
-      <p:sp xmlns:a="http://schemas.openxmlformats.org/drawingml/2006/main">
-        <p:nvSpPr>
-          <p:cNvPr id="11" name="TextBox 10"/>
-          <p:cNvSpPr txBox="1"/>
-          <p:nvPr/>
-        </p:nvSpPr>
-        <p:spPr>
-          <a:xfrm>
-            <a:off x="8796528" y="1764792"/>
-            <a:ext cx="411480" cy="548640"/>
-          </a:xfrm>
-          <a:prstGeom prst="rect">
-            <a:avLst/>
-          </a:prstGeom>
-          <a:noFill/>
-        </p:spPr>
-        <p:txBody>
-          <a:bodyPr wrap="square" lIns="109728" rIns="109728" tIns="91440">
-            <a:spAutoFit/>
-          </a:bodyPr>
-          <a:lstStyle/>
-          <a:p>
-            <a:pPr>
-              <a:spcAft>
-                <a:spcPts val="1000"/>
-              </a:spcAft>
-              <a:defRPr sz="2300" b="0">
-                <a:solidFill>
-                  <a:srgbClr val="B65B2C"/>
-                </a:solidFill>
-                <a:latin typeface="Aptos"/>
-              </a:defRPr>
-            </a:pPr>
-            <a:r>
-              <a:t>→</a:t>
-            </a:r>
-          </a:p>
-        </p:txBody>
-      </p:sp>
-      <p:sp xmlns:a="http://schemas.openxmlformats.org/drawingml/2006/main">
-        <p:nvSpPr>
-          <p:cNvPr id="12" name="Rounded Rectangle 11"/>
-          <p:cNvSpPr/>
-          <p:nvPr/>
-        </p:nvSpPr>
-        <p:spPr>
-          <a:xfrm>
-            <a:off x="9290304" y="1508760"/>
-            <a:ext cx="2331720" cy="1051560"/>
-          </a:xfrm>
-          <a:prstGeom prst="roundRect">
-            <a:avLst/>
-          </a:prstGeom>
-          <a:solidFill>
-            <a:srgbClr val="17303B"/>
-          </a:solidFill>
-          <a:ln>
-            <a:noFill/>
-          </a:ln>
-        </p:spPr>
-        <p:style>
-          <a:lnRef idx="1">
-            <a:schemeClr val="accent1"/>
-          </a:lnRef>
-          <a:fillRef idx="3">
-            <a:schemeClr val="accent1"/>
-          </a:fillRef>
-          <a:effectRef idx="2">
-            <a:schemeClr val="accent1"/>
-          </a:effectRef>
-          <a:fontRef idx="minor">
-            <a:schemeClr val="lt1"/>
-          </a:fontRef>
-        </p:style>
-        <p:txBody>
-          <a:bodyPr rtlCol="0" anchor="ctr" wrap="square" lIns="109728" rIns="109728" tIns="91440"/>
-          <a:lstStyle/>
-          <a:p>
-            <a:pPr algn="ctr">
-              <a:spcAft>
-                <a:spcPts val="1000"/>
-              </a:spcAft>
-              <a:defRPr sz="2300" b="1">
-                <a:solidFill>
-                  <a:srgbClr val="FFFFFF"/>
-                </a:solidFill>
-                <a:latin typeface="Aptos"/>
-              </a:defRPr>
-            </a:pPr>
-            <a:r>
-              <a:t>INSPECTION</a:t>
-            </a:r>
-          </a:p>
-          <a:p>
-            <a:pPr>
-              <a:spcAft>
-                <a:spcPts val="1000"/>
-              </a:spcAft>
-              <a:defRPr sz="2300" b="1">
-                <a:solidFill>
-                  <a:srgbClr val="FFFFFF"/>
-                </a:solidFill>
-                <a:latin typeface="Aptos"/>
-              </a:defRPr>
-            </a:pPr>
-            <a:r>
-              <a:t>10 sec</a:t>
-            </a:r>
-          </a:p>
-        </p:txBody>
-      </p:sp>
-      <p:sp xmlns:a="http://schemas.openxmlformats.org/drawingml/2006/main">
-        <p:nvSpPr>
-          <p:cNvPr id="13" name="TextBox 12"/>
-          <p:cNvSpPr txBox="1"/>
-          <p:nvPr/>
-        </p:nvSpPr>
-        <p:spPr>
-          <a:xfrm>
-            <a:off x="731520" y="2788920"/>
-            <a:ext cx="10789920" cy="548640"/>
-          </a:xfrm>
-          <a:prstGeom prst="rect">
-            <a:avLst/>
-          </a:prstGeom>
-          <a:noFill/>
-        </p:spPr>
-        <p:txBody>
-          <a:bodyPr wrap="square" lIns="109728" rIns="109728" tIns="91440">
-            <a:spAutoFit/>
-          </a:bodyPr>
-          <a:lstStyle/>
-          <a:p>
-            <a:pPr>
-              <a:spcAft>
-                <a:spcPts val="1000"/>
-              </a:spcAft>
-              <a:defRPr sz="2000" b="0">
-                <a:solidFill>
-                  <a:srgbClr val="17303B"/>
-                </a:solidFill>
-                <a:latin typeface="Aptos"/>
-              </a:defRPr>
-            </a:pPr>
-            <a:r>
-              <a:t>Teams of 3: operations • worker • finance | One worker per station</a:t>
-            </a:r>
-          </a:p>
-        </p:txBody>
-      </p:sp>
-      <p:sp xmlns:a="http://schemas.openxmlformats.org/drawingml/2006/main">
-        <p:nvSpPr>
-          <p:cNvPr id="14" name="Rounded Rectangle 13"/>
-          <p:cNvSpPr/>
-          <p:nvPr/>
-        </p:nvSpPr>
-        <p:spPr>
-          <a:xfrm>
-            <a:off x="731520" y="3520440"/>
-            <a:ext cx="3611880" cy="1143000"/>
+            <a:off x="777240" y="3886200"/>
+            <a:ext cx="10652760" cy="1371600"/>
           </a:xfrm>
           <a:prstGeom prst="roundRect">
             <a:avLst/>
@@ -22077,14 +21335,14 @@
           </a:fontRef>
         </p:style>
         <p:txBody>
-          <a:bodyPr rtlCol="0" anchor="ctr" wrap="square" lIns="109728" rIns="109728" tIns="91440"/>
+          <a:bodyPr rtlCol="0" anchor="ctr" wrap="square" lIns="128016" rIns="128016" tIns="91440"/>
           <a:lstStyle/>
           <a:p>
             <a:pPr algn="ctr">
               <a:spcAft>
-                <a:spcPts val="1000"/>
+                <a:spcPts val="800"/>
               </a:spcAft>
-              <a:defRPr sz="2200" b="0">
+              <a:defRPr sz="2500" b="0">
                 <a:solidFill>
                   <a:srgbClr val="17303B"/>
                 </a:solidFill>
@@ -22092,15 +21350,15 @@
               </a:defRPr>
             </a:pPr>
             <a:r>
-              <a:t>A  Faster frames</a:t>
+              <a:t>In groups of four, agree on TWO changes you would make.</a:t>
             </a:r>
           </a:p>
           <a:p>
             <a:pPr>
               <a:spcAft>
-                <a:spcPts val="1000"/>
+                <a:spcPts val="800"/>
               </a:spcAft>
-              <a:defRPr sz="2200" b="0">
+              <a:defRPr sz="2500" b="0">
                 <a:solidFill>
                   <a:srgbClr val="17303B"/>
                 </a:solidFill>
@@ -22108,71 +21366,15 @@
               </a:defRPr>
             </a:pPr>
             <a:r>
-              <a:t>10 sec → 5 sec</a:t>
-            </a:r>
-          </a:p>
-        </p:txBody>
-      </p:sp>
-      <p:sp xmlns:a="http://schemas.openxmlformats.org/drawingml/2006/main">
-        <p:nvSpPr>
-          <p:cNvPr id="15" name="Rounded Rectangle 14"/>
-          <p:cNvSpPr/>
-          <p:nvPr/>
-        </p:nvSpPr>
-        <p:spPr>
-          <a:xfrm>
-            <a:off x="4526280" y="3520440"/>
-            <a:ext cx="3611880" cy="1143000"/>
-          </a:xfrm>
-          <a:prstGeom prst="roundRect">
-            <a:avLst/>
-          </a:prstGeom>
-          <a:solidFill>
-            <a:srgbClr val="E7E1D3"/>
-          </a:solidFill>
-          <a:ln>
-            <a:noFill/>
-          </a:ln>
-        </p:spPr>
-        <p:style>
-          <a:lnRef idx="1">
-            <a:schemeClr val="accent1"/>
-          </a:lnRef>
-          <a:fillRef idx="3">
-            <a:schemeClr val="accent1"/>
-          </a:fillRef>
-          <a:effectRef idx="2">
-            <a:schemeClr val="accent1"/>
-          </a:effectRef>
-          <a:fontRef idx="minor">
-            <a:schemeClr val="lt1"/>
-          </a:fontRef>
-        </p:style>
-        <p:txBody>
-          <a:bodyPr rtlCol="0" anchor="ctr" wrap="square" lIns="109728" rIns="109728" tIns="91440"/>
-          <a:lstStyle/>
-          <a:p>
-            <a:pPr algn="ctr">
-              <a:spcAft>
-                <a:spcPts val="1000"/>
-              </a:spcAft>
-              <a:defRPr sz="2200" b="0">
-                <a:solidFill>
-                  <a:srgbClr val="17303B"/>
-                </a:solidFill>
-                <a:latin typeface="Aptos"/>
-              </a:defRPr>
-            </a:pPr>
-            <a:r>
-              <a:t>B  Add capacity</a:t>
+              <a:t>How would they help workers stay? What would they cost?</a:t>
             </a:r>
           </a:p>
           <a:p>
             <a:pPr>
               <a:spcAft>
-                <a:spcPts val="1000"/>
+                <a:spcPts val="800"/>
               </a:spcAft>
-              <a:defRPr sz="2200" b="0">
+              <a:defRPr sz="2500" b="0">
                 <a:solidFill>
                   <a:srgbClr val="17303B"/>
                 </a:solidFill>
@@ -22180,93 +21382,21 @@
               </a:defRPr>
             </a:pPr>
             <a:r>
-              <a:t>Second wheels worker</a:t>
+              <a:t>How would you tell whether your plan worked?</a:t>
             </a:r>
           </a:p>
         </p:txBody>
       </p:sp>
       <p:sp xmlns:a="http://schemas.openxmlformats.org/drawingml/2006/main">
         <p:nvSpPr>
-          <p:cNvPr id="16" name="Rounded Rectangle 15"/>
-          <p:cNvSpPr/>
+          <p:cNvPr id="7" name="TextBox 6"/>
+          <p:cNvSpPr txBox="1"/>
           <p:nvPr/>
         </p:nvSpPr>
         <p:spPr>
           <a:xfrm>
-            <a:off x="8321040" y="3520440"/>
-            <a:ext cx="3611880" cy="1143000"/>
-          </a:xfrm>
-          <a:prstGeom prst="roundRect">
-            <a:avLst/>
-          </a:prstGeom>
-          <a:solidFill>
-            <a:srgbClr val="E7E1D3"/>
-          </a:solidFill>
-          <a:ln>
-            <a:noFill/>
-          </a:ln>
-        </p:spPr>
-        <p:style>
-          <a:lnRef idx="1">
-            <a:schemeClr val="accent1"/>
-          </a:lnRef>
-          <a:fillRef idx="3">
-            <a:schemeClr val="accent1"/>
-          </a:fillRef>
-          <a:effectRef idx="2">
-            <a:schemeClr val="accent1"/>
-          </a:effectRef>
-          <a:fontRef idx="minor">
-            <a:schemeClr val="lt1"/>
-          </a:fontRef>
-        </p:style>
-        <p:txBody>
-          <a:bodyPr rtlCol="0" anchor="ctr" wrap="square" lIns="109728" rIns="109728" tIns="91440"/>
-          <a:lstStyle/>
-          <a:p>
-            <a:pPr algn="ctr">
-              <a:spcAft>
-                <a:spcPts val="1000"/>
-              </a:spcAft>
-              <a:defRPr sz="2200" b="0">
-                <a:solidFill>
-                  <a:srgbClr val="17303B"/>
-                </a:solidFill>
-                <a:latin typeface="Aptos"/>
-              </a:defRPr>
-            </a:pPr>
-            <a:r>
-              <a:t>C  Raise pay</a:t>
-            </a:r>
-          </a:p>
-          <a:p>
-            <a:pPr>
-              <a:spcAft>
-                <a:spcPts val="1000"/>
-              </a:spcAft>
-              <a:defRPr sz="2200" b="0">
-                <a:solidFill>
-                  <a:srgbClr val="17303B"/>
-                </a:solidFill>
-                <a:latin typeface="Aptos"/>
-              </a:defRPr>
-            </a:pPr>
-            <a:r>
-              <a:t>Aim to reduce quitting</a:t>
-            </a:r>
-          </a:p>
-        </p:txBody>
-      </p:sp>
-      <p:sp xmlns:a="http://schemas.openxmlformats.org/drawingml/2006/main">
-        <p:nvSpPr>
-          <p:cNvPr id="17" name="TextBox 16"/>
-          <p:cNvSpPr txBox="1"/>
-          <p:nvPr/>
-        </p:nvSpPr>
-        <p:spPr>
-          <a:xfrm>
-            <a:off x="731520" y="4892040"/>
-            <a:ext cx="10789920" cy="960120"/>
+            <a:off x="777240" y="5577840"/>
+            <a:ext cx="10652760" cy="457200"/>
           </a:xfrm>
           <a:prstGeom prst="rect">
             <a:avLst/>
@@ -22274,16 +21404,16 @@
           <a:noFill/>
         </p:spPr>
         <p:txBody>
-          <a:bodyPr wrap="square" lIns="109728" rIns="109728" tIns="91440">
+          <a:bodyPr wrap="square" lIns="128016" rIns="128016" tIns="91440">
             <a:spAutoFit/>
           </a:bodyPr>
           <a:lstStyle/>
           <a:p>
             <a:pPr>
               <a:spcAft>
-                <a:spcPts val="1000"/>
+                <a:spcPts val="800"/>
               </a:spcAft>
-              <a:defRPr sz="2200" b="0">
+              <a:defRPr sz="1800" b="0">
                 <a:solidFill>
                   <a:srgbClr val="17303B"/>
                 </a:solidFill>
@@ -22291,23 +21421,7 @@
               </a:defRPr>
             </a:pPr>
             <a:r>
-              <a:t>Decide: bottleneck, units/minute, and one worker concern.</a:t>
-            </a:r>
-          </a:p>
-          <a:p>
-            <a:pPr>
-              <a:spcAft>
-                <a:spcPts val="1000"/>
-              </a:spcAft>
-              <a:defRPr sz="2200" b="0">
-                <a:solidFill>
-                  <a:srgbClr val="17303B"/>
-                </a:solidFill>
-                <a:latin typeface="Aptos"/>
-              </a:defRPr>
-            </a:pPr>
-            <a:r>
-              <a:t>Then one wheels worker quits. Does your choice still work?</a:t>
+              <a:t>2 minutes to discuss • Three groups share a 20-second plan • Combine solutions</a:t>
             </a:r>
           </a:p>
         </p:txBody>
@@ -22341,1163 +21455,419 @@
       <p:grpSpPr>
         <a:xfrm xmlns:a="http://schemas.openxmlformats.org/drawingml/2006/main"/>
       </p:grpSpPr>
-      <p:sp>
-        <p:nvSpPr>
-          <p:cNvPr id="8" name="">
-            <a:extLst xmlns:a="http://schemas.openxmlformats.org/drawingml/2006/main">
-              <a:ext uri="{FF2B5EF4-FFF2-40B4-BE49-F238E27FC236}">
-                <a16:creationId xmlns:a16="http://schemas.microsoft.com/office/drawing/2014/main" id="{53819256-7B91-41A9-AF5C-886F98929FC5}"/>
-              </a:ext>
-            </a:extLst>
-          </p:cNvPr>
-          <p:cNvSpPr>
-            <a:spLocks xmlns:a="http://schemas.openxmlformats.org/drawingml/2006/main" noGrp="1"/>
-          </p:cNvSpPr>
+      <p:sp xmlns:a="http://schemas.openxmlformats.org/drawingml/2006/main">
+        <p:nvSpPr>
+          <p:cNvPr id="2" name="TextBox 1"/>
+          <p:cNvSpPr txBox="1"/>
           <p:nvPr/>
         </p:nvSpPr>
         <p:spPr>
-          <a:xfrm xmlns:a="http://schemas.openxmlformats.org/drawingml/2006/main">
-            <a:off x="609600" y="457200"/>
-            <a:ext cx="10858500" cy="1066800"/>
+          <a:xfrm>
+            <a:off x="594360" y="411480"/>
+            <a:ext cx="10972800" cy="960120"/>
           </a:xfrm>
-          <a:prstGeom xmlns:a="http://schemas.openxmlformats.org/drawingml/2006/main" prst="rect">
+          <a:prstGeom prst="rect">
             <a:avLst/>
           </a:prstGeom>
-          <a:noFill xmlns:a="http://schemas.openxmlformats.org/drawingml/2006/main"/>
-          <a:ln xmlns:a="http://schemas.openxmlformats.org/drawingml/2006/main" w="0">
+          <a:noFill/>
+        </p:spPr>
+        <p:txBody>
+          <a:bodyPr wrap="square" lIns="128016" rIns="128016" tIns="91440">
+            <a:spAutoFit/>
+          </a:bodyPr>
+          <a:lstStyle/>
+          <a:p>
+            <a:pPr>
+              <a:spcAft>
+                <a:spcPts val="800"/>
+              </a:spcAft>
+              <a:defRPr sz="3100" b="1">
+                <a:solidFill>
+                  <a:srgbClr val="17303B"/>
+                </a:solidFill>
+                <a:latin typeface="Aptos"/>
+              </a:defRPr>
+            </a:pPr>
+            <a:r>
+              <a:t>What Ford announced in January 1914</a:t>
+            </a:r>
+          </a:p>
+        </p:txBody>
+      </p:sp>
+      <p:sp xmlns:a="http://schemas.openxmlformats.org/drawingml/2006/main">
+        <p:nvSpPr>
+          <p:cNvPr id="3" name="TextBox 2"/>
+          <p:cNvSpPr txBox="1"/>
+          <p:nvPr/>
+        </p:nvSpPr>
+        <p:spPr>
+          <a:xfrm>
+            <a:off x="11384280" y="6419088"/>
+            <a:ext cx="457200" cy="274320"/>
+          </a:xfrm>
+          <a:prstGeom prst="rect">
+            <a:avLst/>
+          </a:prstGeom>
+          <a:noFill/>
+        </p:spPr>
+        <p:txBody>
+          <a:bodyPr wrap="square" lIns="128016" rIns="128016" tIns="91440">
+            <a:spAutoFit/>
+          </a:bodyPr>
+          <a:lstStyle/>
+          <a:p>
+            <a:pPr>
+              <a:spcAft>
+                <a:spcPts val="800"/>
+              </a:spcAft>
+              <a:defRPr sz="1000" b="0">
+                <a:solidFill>
+                  <a:srgbClr val="586A70"/>
+                </a:solidFill>
+                <a:latin typeface="Aptos"/>
+              </a:defRPr>
+            </a:pPr>
+            <a:r>
+              <a:t>04</a:t>
+            </a:r>
+          </a:p>
+        </p:txBody>
+      </p:sp>
+      <p:sp xmlns:a="http://schemas.openxmlformats.org/drawingml/2006/main">
+        <p:nvSpPr>
+          <p:cNvPr id="4" name="TextBox 3"/>
+          <p:cNvSpPr txBox="1"/>
+          <p:nvPr/>
+        </p:nvSpPr>
+        <p:spPr>
+          <a:xfrm>
+            <a:off x="822960" y="1463040"/>
+            <a:ext cx="5074920" cy="502920"/>
+          </a:xfrm>
+          <a:prstGeom prst="rect">
+            <a:avLst/>
+          </a:prstGeom>
+          <a:noFill/>
+        </p:spPr>
+        <p:txBody>
+          <a:bodyPr wrap="square" lIns="128016" rIns="128016" tIns="91440">
+            <a:spAutoFit/>
+          </a:bodyPr>
+          <a:lstStyle/>
+          <a:p>
+            <a:pPr>
+              <a:spcAft>
+                <a:spcPts val="800"/>
+              </a:spcAft>
+              <a:defRPr sz="2200" b="1">
+                <a:solidFill>
+                  <a:srgbClr val="B65B2C"/>
+                </a:solidFill>
+                <a:latin typeface="Aptos"/>
+              </a:defRPr>
+            </a:pPr>
+            <a:r>
+              <a:t>BEFORE</a:t>
+            </a:r>
+          </a:p>
+        </p:txBody>
+      </p:sp>
+      <p:sp xmlns:a="http://schemas.openxmlformats.org/drawingml/2006/main">
+        <p:nvSpPr>
+          <p:cNvPr id="5" name="TextBox 4"/>
+          <p:cNvSpPr txBox="1"/>
+          <p:nvPr/>
+        </p:nvSpPr>
+        <p:spPr>
+          <a:xfrm>
+            <a:off x="6309360" y="1463040"/>
+            <a:ext cx="5074920" cy="502920"/>
+          </a:xfrm>
+          <a:prstGeom prst="rect">
+            <a:avLst/>
+          </a:prstGeom>
+          <a:noFill/>
+        </p:spPr>
+        <p:txBody>
+          <a:bodyPr wrap="square" lIns="128016" rIns="128016" tIns="91440">
+            <a:spAutoFit/>
+          </a:bodyPr>
+          <a:lstStyle/>
+          <a:p>
+            <a:pPr>
+              <a:spcAft>
+                <a:spcPts val="800"/>
+              </a:spcAft>
+              <a:defRPr sz="2200" b="1">
+                <a:solidFill>
+                  <a:srgbClr val="B65B2C"/>
+                </a:solidFill>
+                <a:latin typeface="Aptos"/>
+              </a:defRPr>
+            </a:pPr>
+            <a:r>
+              <a:t>NEW PLAN</a:t>
+            </a:r>
+          </a:p>
+        </p:txBody>
+      </p:sp>
+      <p:sp xmlns:a="http://schemas.openxmlformats.org/drawingml/2006/main">
+        <p:nvSpPr>
+          <p:cNvPr id="6" name="Rounded Rectangle 5"/>
+          <p:cNvSpPr/>
+          <p:nvPr/>
+        </p:nvSpPr>
+        <p:spPr>
+          <a:xfrm>
+            <a:off x="822960" y="2103120"/>
+            <a:ext cx="5074920" cy="1508760"/>
+          </a:xfrm>
+          <a:prstGeom prst="roundRect">
+            <a:avLst/>
+          </a:prstGeom>
+          <a:solidFill>
+            <a:srgbClr val="E7E1D3"/>
+          </a:solidFill>
+          <a:ln>
             <a:noFill/>
           </a:ln>
         </p:spPr>
-        <p:txBody>
-          <a:bodyPr xmlns:a="http://schemas.openxmlformats.org/drawingml/2006/main" lIns="0" tIns="0" rIns="0" bIns="0"/>
-          <a:lstStyle xmlns:a="http://schemas.openxmlformats.org/drawingml/2006/main">
-            <a:defPPr>
-              <a:defRPr sz="3225" b="1">
-                <a:solidFill>
-                  <a:srgbClr val="172A36"/>
-                </a:solidFill>
-                <a:latin typeface="Arial"/>
-                <a:ea typeface="Arial"/>
-                <a:cs typeface="Arial"/>
-              </a:defRPr>
-            </a:defPPr>
-            <a:lvl1pPr>
-              <a:defRPr sz="3225" b="1">
-                <a:solidFill>
-                  <a:srgbClr val="172A36"/>
-                </a:solidFill>
-                <a:latin typeface="Arial"/>
-                <a:ea typeface="Arial"/>
-                <a:cs typeface="Arial"/>
-              </a:defRPr>
-            </a:lvl1pPr>
-            <a:lvl2pPr>
-              <a:defRPr sz="3225" b="1">
-                <a:solidFill>
-                  <a:srgbClr val="172A36"/>
-                </a:solidFill>
-                <a:latin typeface="Arial"/>
-                <a:ea typeface="Arial"/>
-                <a:cs typeface="Arial"/>
-              </a:defRPr>
-            </a:lvl2pPr>
-            <a:lvl3pPr>
-              <a:defRPr sz="3225" b="1">
-                <a:solidFill>
-                  <a:srgbClr val="172A36"/>
-                </a:solidFill>
-                <a:latin typeface="Arial"/>
-                <a:ea typeface="Arial"/>
-                <a:cs typeface="Arial"/>
-              </a:defRPr>
-            </a:lvl3pPr>
-            <a:lvl4pPr>
-              <a:defRPr sz="3225" b="1">
-                <a:solidFill>
-                  <a:srgbClr val="172A36"/>
-                </a:solidFill>
-                <a:latin typeface="Arial"/>
-                <a:ea typeface="Arial"/>
-                <a:cs typeface="Arial"/>
-              </a:defRPr>
-            </a:lvl4pPr>
-            <a:lvl5pPr>
-              <a:defRPr sz="3225" b="1">
-                <a:solidFill>
-                  <a:srgbClr val="172A36"/>
-                </a:solidFill>
-                <a:latin typeface="Arial"/>
-                <a:ea typeface="Arial"/>
-                <a:cs typeface="Arial"/>
-              </a:defRPr>
-            </a:lvl5pPr>
-            <a:lvl6pPr>
-              <a:defRPr sz="3225" b="1">
-                <a:solidFill>
-                  <a:srgbClr val="172A36"/>
-                </a:solidFill>
-                <a:latin typeface="Arial"/>
-                <a:ea typeface="Arial"/>
-                <a:cs typeface="Arial"/>
-              </a:defRPr>
-            </a:lvl6pPr>
-            <a:lvl7pPr>
-              <a:defRPr sz="3225" b="1">
-                <a:solidFill>
-                  <a:srgbClr val="172A36"/>
-                </a:solidFill>
-                <a:latin typeface="Arial"/>
-                <a:ea typeface="Arial"/>
-                <a:cs typeface="Arial"/>
-              </a:defRPr>
-            </a:lvl7pPr>
-            <a:lvl8pPr>
-              <a:defRPr sz="3225" b="1">
-                <a:solidFill>
-                  <a:srgbClr val="172A36"/>
-                </a:solidFill>
-                <a:latin typeface="Arial"/>
-                <a:ea typeface="Arial"/>
-                <a:cs typeface="Arial"/>
-              </a:defRPr>
-            </a:lvl8pPr>
-            <a:lvl9pPr>
-              <a:defRPr sz="3225" b="1">
-                <a:solidFill>
-                  <a:srgbClr val="172A36"/>
-                </a:solidFill>
-                <a:latin typeface="Arial"/>
-                <a:ea typeface="Arial"/>
-                <a:cs typeface="Arial"/>
-              </a:defRPr>
-            </a:lvl9pPr>
-          </a:lstStyle>
-          <a:p xmlns:a="http://schemas.openxmlformats.org/drawingml/2006/main">
+        <p:style>
+          <a:lnRef idx="1">
+            <a:schemeClr val="accent1"/>
+          </a:lnRef>
+          <a:fillRef idx="3">
+            <a:schemeClr val="accent1"/>
+          </a:fillRef>
+          <a:effectRef idx="2">
+            <a:schemeClr val="accent1"/>
+          </a:effectRef>
+          <a:fontRef idx="minor">
+            <a:schemeClr val="lt1"/>
+          </a:fontRef>
+        </p:style>
+        <p:txBody>
+          <a:bodyPr rtlCol="0" anchor="ctr" wrap="square" lIns="128016" rIns="128016" tIns="91440"/>
+          <a:lstStyle/>
+          <a:p>
+            <a:pPr algn="ctr">
+              <a:spcAft>
+                <a:spcPts val="800"/>
+              </a:spcAft>
+              <a:defRPr sz="2900" b="0">
+                <a:solidFill>
+                  <a:srgbClr val="17303B"/>
+                </a:solidFill>
+                <a:latin typeface="Aptos"/>
+              </a:defRPr>
+            </a:pPr>
+            <a:r>
+              <a:t>About $2.34 per day</a:t>
+            </a:r>
+          </a:p>
+          <a:p>
             <a:pPr>
-              <a:defRPr sz="3225" b="1">
-                <a:solidFill>
-                  <a:srgbClr val="172A36"/>
-                </a:solidFill>
-                <a:latin typeface="Arial"/>
-                <a:ea typeface="Arial"/>
-                <a:cs typeface="Arial"/>
-              </a:defRPr>
-            </a:pPr>
-            <a:r>
-              <a:rPr sz="3225" b="1">
-                <a:solidFill>
-                  <a:srgbClr val="172A36"/>
-                </a:solidFill>
-                <a:latin typeface="Arial"/>
-                <a:ea typeface="Arial"/>
-                <a:cs typeface="Arial"/>
-              </a:rPr>
-              <a:t>Activity debrief: capacity and retention</a:t>
-            </a:r>
-          </a:p>
-        </p:txBody>
-      </p:sp>
-      <p:sp>
-        <p:nvSpPr>
-          <p:cNvPr id="2" name="">
-            <a:extLst xmlns:a="http://schemas.openxmlformats.org/drawingml/2006/main">
-              <a:ext uri="{FF2B5EF4-FFF2-40B4-BE49-F238E27FC236}">
-                <a16:creationId xmlns:a16="http://schemas.microsoft.com/office/drawing/2014/main" id="{39ACF175-CBE7-46D5-A617-50F83A5C031C}"/>
-              </a:ext>
-            </a:extLst>
-          </p:cNvPr>
-          <p:cNvSpPr>
-            <a:spLocks xmlns:a="http://schemas.openxmlformats.org/drawingml/2006/main" noGrp="1"/>
-          </p:cNvSpPr>
+              <a:spcAft>
+                <a:spcPts val="800"/>
+              </a:spcAft>
+              <a:defRPr sz="2900" b="0">
+                <a:solidFill>
+                  <a:srgbClr val="17303B"/>
+                </a:solidFill>
+                <a:latin typeface="Aptos"/>
+              </a:defRPr>
+            </a:pPr>
+            <a:r>
+              <a:t>9-hour workday</a:t>
+            </a:r>
+          </a:p>
+        </p:txBody>
+      </p:sp>
+      <p:sp xmlns:a="http://schemas.openxmlformats.org/drawingml/2006/main">
+        <p:nvSpPr>
+          <p:cNvPr id="7" name="Rounded Rectangle 6"/>
+          <p:cNvSpPr/>
           <p:nvPr/>
         </p:nvSpPr>
         <p:spPr>
-          <a:xfrm xmlns:a="http://schemas.openxmlformats.org/drawingml/2006/main">
-            <a:off x="666750" y="1762125"/>
-            <a:ext cx="10572750" cy="1123950"/>
+          <a:xfrm>
+            <a:off x="6309360" y="2103120"/>
+            <a:ext cx="5074920" cy="1508760"/>
           </a:xfrm>
-          <a:prstGeom xmlns:a="http://schemas.openxmlformats.org/drawingml/2006/main" prst="rect">
+          <a:prstGeom prst="roundRect">
             <a:avLst/>
           </a:prstGeom>
-          <a:noFill xmlns:a="http://schemas.openxmlformats.org/drawingml/2006/main"/>
-          <a:ln xmlns:a="http://schemas.openxmlformats.org/drawingml/2006/main" w="0">
+          <a:solidFill>
+            <a:srgbClr val="E7E1D3"/>
+          </a:solidFill>
+          <a:ln>
             <a:noFill/>
           </a:ln>
         </p:spPr>
-        <p:txBody>
-          <a:bodyPr xmlns:a="http://schemas.openxmlformats.org/drawingml/2006/main" lIns="0" tIns="0" rIns="0" bIns="0"/>
-          <a:lstStyle xmlns:a="http://schemas.openxmlformats.org/drawingml/2006/main">
-            <a:defPPr>
-              <a:defRPr sz="2250" b="0">
-                <a:solidFill>
-                  <a:srgbClr val="172A36"/>
-                </a:solidFill>
-                <a:latin typeface="Arial"/>
-                <a:ea typeface="Arial"/>
-                <a:cs typeface="Arial"/>
-              </a:defRPr>
-            </a:defPPr>
-            <a:lvl1pPr>
-              <a:defRPr sz="2250" b="0">
-                <a:solidFill>
-                  <a:srgbClr val="172A36"/>
-                </a:solidFill>
-                <a:latin typeface="Arial"/>
-                <a:ea typeface="Arial"/>
-                <a:cs typeface="Arial"/>
-              </a:defRPr>
-            </a:lvl1pPr>
-            <a:lvl2pPr>
-              <a:defRPr sz="2250" b="0">
-                <a:solidFill>
-                  <a:srgbClr val="172A36"/>
-                </a:solidFill>
-                <a:latin typeface="Arial"/>
-                <a:ea typeface="Arial"/>
-                <a:cs typeface="Arial"/>
-              </a:defRPr>
-            </a:lvl2pPr>
-            <a:lvl3pPr>
-              <a:defRPr sz="2250" b="0">
-                <a:solidFill>
-                  <a:srgbClr val="172A36"/>
-                </a:solidFill>
-                <a:latin typeface="Arial"/>
-                <a:ea typeface="Arial"/>
-                <a:cs typeface="Arial"/>
-              </a:defRPr>
-            </a:lvl3pPr>
-            <a:lvl4pPr>
-              <a:defRPr sz="2250" b="0">
-                <a:solidFill>
-                  <a:srgbClr val="172A36"/>
-                </a:solidFill>
-                <a:latin typeface="Arial"/>
-                <a:ea typeface="Arial"/>
-                <a:cs typeface="Arial"/>
-              </a:defRPr>
-            </a:lvl4pPr>
-            <a:lvl5pPr>
-              <a:defRPr sz="2250" b="0">
-                <a:solidFill>
-                  <a:srgbClr val="172A36"/>
-                </a:solidFill>
-                <a:latin typeface="Arial"/>
-                <a:ea typeface="Arial"/>
-                <a:cs typeface="Arial"/>
-              </a:defRPr>
-            </a:lvl5pPr>
-            <a:lvl6pPr>
-              <a:defRPr sz="2250" b="0">
-                <a:solidFill>
-                  <a:srgbClr val="172A36"/>
-                </a:solidFill>
-                <a:latin typeface="Arial"/>
-                <a:ea typeface="Arial"/>
-                <a:cs typeface="Arial"/>
-              </a:defRPr>
-            </a:lvl6pPr>
-            <a:lvl7pPr>
-              <a:defRPr sz="2250" b="0">
-                <a:solidFill>
-                  <a:srgbClr val="172A36"/>
-                </a:solidFill>
-                <a:latin typeface="Arial"/>
-                <a:ea typeface="Arial"/>
-                <a:cs typeface="Arial"/>
-              </a:defRPr>
-            </a:lvl7pPr>
-            <a:lvl8pPr>
-              <a:defRPr sz="2250" b="0">
-                <a:solidFill>
-                  <a:srgbClr val="172A36"/>
-                </a:solidFill>
-                <a:latin typeface="Arial"/>
-                <a:ea typeface="Arial"/>
-                <a:cs typeface="Arial"/>
-              </a:defRPr>
-            </a:lvl8pPr>
-            <a:lvl9pPr>
-              <a:defRPr sz="2250" b="0">
-                <a:solidFill>
-                  <a:srgbClr val="172A36"/>
-                </a:solidFill>
-                <a:latin typeface="Arial"/>
-                <a:ea typeface="Arial"/>
-                <a:cs typeface="Arial"/>
-              </a:defRPr>
-            </a:lvl9pPr>
-          </a:lstStyle>
-          <a:p xmlns:a="http://schemas.openxmlformats.org/drawingml/2006/main">
+        <p:style>
+          <a:lnRef idx="1">
+            <a:schemeClr val="accent1"/>
+          </a:lnRef>
+          <a:fillRef idx="3">
+            <a:schemeClr val="accent1"/>
+          </a:fillRef>
+          <a:effectRef idx="2">
+            <a:schemeClr val="accent1"/>
+          </a:effectRef>
+          <a:fontRef idx="minor">
+            <a:schemeClr val="lt1"/>
+          </a:fontRef>
+        </p:style>
+        <p:txBody>
+          <a:bodyPr rtlCol="0" anchor="ctr" wrap="square" lIns="128016" rIns="128016" tIns="91440"/>
+          <a:lstStyle/>
+          <a:p>
+            <a:pPr algn="ctr">
+              <a:spcAft>
+                <a:spcPts val="800"/>
+              </a:spcAft>
+              <a:defRPr sz="2700" b="0">
+                <a:solidFill>
+                  <a:srgbClr val="17303B"/>
+                </a:solidFill>
+                <a:latin typeface="Aptos"/>
+              </a:defRPr>
+            </a:pPr>
+            <a:r>
+              <a:t>$5 per day for eligible workers</a:t>
+            </a:r>
+          </a:p>
+          <a:p>
             <a:pPr>
-              <a:defRPr sz="2250" b="0">
-                <a:solidFill>
-                  <a:srgbClr val="172A36"/>
-                </a:solidFill>
-                <a:latin typeface="Arial"/>
-                <a:ea typeface="Arial"/>
-                <a:cs typeface="Arial"/>
-              </a:defRPr>
-            </a:pPr>
-            <a:r>
-              <a:rPr sz="2250" b="0">
-                <a:solidFill>
-                  <a:srgbClr val="172A36"/>
-                </a:solidFill>
-                <a:latin typeface="Arial"/>
-                <a:ea typeface="Arial"/>
-                <a:cs typeface="Arial"/>
-              </a:rPr>
-              <a:t>Baseline: wheels limits steady-state output to 3 units/min.</a:t>
-            </a:r>
-          </a:p>
-          <a:p xmlns:a="http://schemas.openxmlformats.org/drawingml/2006/main">
-            <a:pPr>
-              <a:defRPr sz="2250" b="0">
-                <a:solidFill>
-                  <a:srgbClr val="172A36"/>
-                </a:solidFill>
-                <a:latin typeface="Arial"/>
-                <a:ea typeface="Arial"/>
-                <a:cs typeface="Arial"/>
-              </a:defRPr>
-            </a:pPr>
-            <a:r>
-              <a:rPr sz="2250" b="0">
-                <a:solidFill>
-                  <a:srgbClr val="172A36"/>
-                </a:solidFill>
-                <a:latin typeface="Arial"/>
-                <a:ea typeface="Arial"/>
-                <a:cs typeface="Arial"/>
-              </a:rPr>
-              <a:t>A) faster frames still yields 3 units/min.</a:t>
-            </a:r>
-          </a:p>
-        </p:txBody>
-      </p:sp>
-      <p:sp>
-        <p:nvSpPr>
-          <p:cNvPr id="3" name="">
-            <a:extLst xmlns:a="http://schemas.openxmlformats.org/drawingml/2006/main">
-              <a:ext uri="{FF2B5EF4-FFF2-40B4-BE49-F238E27FC236}">
-                <a16:creationId xmlns:a16="http://schemas.microsoft.com/office/drawing/2014/main" id="{CE61D5FE-2B30-419C-AD3D-151754BD84F5}"/>
-              </a:ext>
-            </a:extLst>
-          </p:cNvPr>
-          <p:cNvSpPr>
-            <a:spLocks xmlns:a="http://schemas.openxmlformats.org/drawingml/2006/main" noGrp="1"/>
-          </p:cNvSpPr>
+              <a:spcAft>
+                <a:spcPts val="800"/>
+              </a:spcAft>
+              <a:defRPr sz="2700" b="0">
+                <a:solidFill>
+                  <a:srgbClr val="17303B"/>
+                </a:solidFill>
+                <a:latin typeface="Aptos"/>
+              </a:defRPr>
+            </a:pPr>
+            <a:r>
+              <a:t>8-hour workday</a:t>
+            </a:r>
+          </a:p>
+        </p:txBody>
+      </p:sp>
+      <p:sp xmlns:a="http://schemas.openxmlformats.org/drawingml/2006/main">
+        <p:nvSpPr>
+          <p:cNvPr id="8" name="TextBox 7"/>
+          <p:cNvSpPr txBox="1"/>
           <p:nvPr/>
         </p:nvSpPr>
         <p:spPr>
-          <a:xfrm xmlns:a="http://schemas.openxmlformats.org/drawingml/2006/main">
-            <a:off x="666750" y="3019425"/>
-            <a:ext cx="10572750" cy="1123950"/>
+          <a:xfrm>
+            <a:off x="822960" y="3886200"/>
+            <a:ext cx="10515600" cy="731520"/>
           </a:xfrm>
-          <a:prstGeom xmlns:a="http://schemas.openxmlformats.org/drawingml/2006/main" prst="rect">
+          <a:prstGeom prst="rect">
             <a:avLst/>
           </a:prstGeom>
-          <a:noFill xmlns:a="http://schemas.openxmlformats.org/drawingml/2006/main"/>
-          <a:ln xmlns:a="http://schemas.openxmlformats.org/drawingml/2006/main" w="0">
-            <a:noFill/>
-          </a:ln>
+          <a:noFill/>
         </p:spPr>
         <p:txBody>
-          <a:bodyPr xmlns:a="http://schemas.openxmlformats.org/drawingml/2006/main" lIns="0" tIns="0" rIns="0" bIns="0"/>
-          <a:lstStyle xmlns:a="http://schemas.openxmlformats.org/drawingml/2006/main">
-            <a:defPPr>
-              <a:defRPr sz="2250" b="0">
-                <a:solidFill>
-                  <a:srgbClr val="172A36"/>
-                </a:solidFill>
-                <a:latin typeface="Arial"/>
-                <a:ea typeface="Arial"/>
-                <a:cs typeface="Arial"/>
-              </a:defRPr>
-            </a:defPPr>
-            <a:lvl1pPr>
-              <a:defRPr sz="2250" b="0">
-                <a:solidFill>
-                  <a:srgbClr val="172A36"/>
-                </a:solidFill>
-                <a:latin typeface="Arial"/>
-                <a:ea typeface="Arial"/>
-                <a:cs typeface="Arial"/>
-              </a:defRPr>
-            </a:lvl1pPr>
-            <a:lvl2pPr>
-              <a:defRPr sz="2250" b="0">
-                <a:solidFill>
-                  <a:srgbClr val="172A36"/>
-                </a:solidFill>
-                <a:latin typeface="Arial"/>
-                <a:ea typeface="Arial"/>
-                <a:cs typeface="Arial"/>
-              </a:defRPr>
-            </a:lvl2pPr>
-            <a:lvl3pPr>
-              <a:defRPr sz="2250" b="0">
-                <a:solidFill>
-                  <a:srgbClr val="172A36"/>
-                </a:solidFill>
-                <a:latin typeface="Arial"/>
-                <a:ea typeface="Arial"/>
-                <a:cs typeface="Arial"/>
-              </a:defRPr>
-            </a:lvl3pPr>
-            <a:lvl4pPr>
-              <a:defRPr sz="2250" b="0">
-                <a:solidFill>
-                  <a:srgbClr val="172A36"/>
-                </a:solidFill>
-                <a:latin typeface="Arial"/>
-                <a:ea typeface="Arial"/>
-                <a:cs typeface="Arial"/>
-              </a:defRPr>
-            </a:lvl4pPr>
-            <a:lvl5pPr>
-              <a:defRPr sz="2250" b="0">
-                <a:solidFill>
-                  <a:srgbClr val="172A36"/>
-                </a:solidFill>
-                <a:latin typeface="Arial"/>
-                <a:ea typeface="Arial"/>
-                <a:cs typeface="Arial"/>
-              </a:defRPr>
-            </a:lvl5pPr>
-            <a:lvl6pPr>
-              <a:defRPr sz="2250" b="0">
-                <a:solidFill>
-                  <a:srgbClr val="172A36"/>
-                </a:solidFill>
-                <a:latin typeface="Arial"/>
-                <a:ea typeface="Arial"/>
-                <a:cs typeface="Arial"/>
-              </a:defRPr>
-            </a:lvl6pPr>
-            <a:lvl7pPr>
-              <a:defRPr sz="2250" b="0">
-                <a:solidFill>
-                  <a:srgbClr val="172A36"/>
-                </a:solidFill>
-                <a:latin typeface="Arial"/>
-                <a:ea typeface="Arial"/>
-                <a:cs typeface="Arial"/>
-              </a:defRPr>
-            </a:lvl7pPr>
-            <a:lvl8pPr>
-              <a:defRPr sz="2250" b="0">
-                <a:solidFill>
-                  <a:srgbClr val="172A36"/>
-                </a:solidFill>
-                <a:latin typeface="Arial"/>
-                <a:ea typeface="Arial"/>
-                <a:cs typeface="Arial"/>
-              </a:defRPr>
-            </a:lvl8pPr>
-            <a:lvl9pPr>
-              <a:defRPr sz="2250" b="0">
-                <a:solidFill>
-                  <a:srgbClr val="172A36"/>
-                </a:solidFill>
-                <a:latin typeface="Arial"/>
-                <a:ea typeface="Arial"/>
-                <a:cs typeface="Arial"/>
-              </a:defRPr>
-            </a:lvl9pPr>
-          </a:lstStyle>
-          <a:p xmlns:a="http://schemas.openxmlformats.org/drawingml/2006/main">
+          <a:bodyPr wrap="square" lIns="128016" rIns="128016" tIns="91440">
+            <a:spAutoFit/>
+          </a:bodyPr>
+          <a:lstStyle/>
+          <a:p>
             <a:pPr>
-              <a:defRPr sz="2250" b="0">
-                <a:solidFill>
-                  <a:srgbClr val="172A36"/>
-                </a:solidFill>
-                <a:latin typeface="Arial"/>
-                <a:ea typeface="Arial"/>
-                <a:cs typeface="Arial"/>
-              </a:defRPr>
-            </a:pPr>
-            <a:r>
-              <a:rPr sz="2250" b="0">
-                <a:solidFill>
-                  <a:srgbClr val="172A36"/>
-                </a:solidFill>
-                <a:latin typeface="Arial"/>
-                <a:ea typeface="Arial"/>
-                <a:cs typeface="Arial"/>
-              </a:rPr>
-              <a:t>B) parallel wheels workers can support 6 units/min.</a:t>
-            </a:r>
-          </a:p>
-          <a:p xmlns:a="http://schemas.openxmlformats.org/drawingml/2006/main">
-            <a:pPr>
-              <a:defRPr sz="2250" b="0">
-                <a:solidFill>
-                  <a:srgbClr val="172A36"/>
-                </a:solidFill>
-                <a:latin typeface="Arial"/>
-                <a:ea typeface="Arial"/>
-                <a:cs typeface="Arial"/>
-              </a:defRPr>
-            </a:pPr>
-            <a:r>
-              <a:rPr sz="2250" b="0">
-                <a:solidFill>
-                  <a:srgbClr val="172A36"/>
-                </a:solidFill>
-                <a:latin typeface="Arial"/>
-                <a:ea typeface="Arial"/>
-                <a:cs typeface="Arial"/>
-              </a:rPr>
-              <a:t>After one quits, capacity returns to 3 units/min.</a:t>
-            </a:r>
-          </a:p>
-        </p:txBody>
-      </p:sp>
-      <p:sp>
-        <p:nvSpPr>
-          <p:cNvPr id="4" name="">
-            <a:extLst xmlns:a="http://schemas.openxmlformats.org/drawingml/2006/main">
-              <a:ext uri="{FF2B5EF4-FFF2-40B4-BE49-F238E27FC236}">
-                <a16:creationId xmlns:a16="http://schemas.microsoft.com/office/drawing/2014/main" id="{A0BA873D-3752-4A14-B335-19A446130C29}"/>
-              </a:ext>
-            </a:extLst>
-          </p:cNvPr>
-          <p:cNvSpPr>
-            <a:spLocks xmlns:a="http://schemas.openxmlformats.org/drawingml/2006/main" noGrp="1"/>
-          </p:cNvSpPr>
+              <a:spcAft>
+                <a:spcPts val="800"/>
+              </a:spcAft>
+              <a:defRPr sz="2400" b="1">
+                <a:solidFill>
+                  <a:srgbClr val="B65B2C"/>
+                </a:solidFill>
+                <a:latin typeface="Aptos"/>
+              </a:defRPr>
+            </a:pPr>
+            <a:r>
+              <a:t>$2.66 more per day • About 114% more • One hour less at work</a:t>
+            </a:r>
+          </a:p>
+        </p:txBody>
+      </p:sp>
+      <p:sp xmlns:a="http://schemas.openxmlformats.org/drawingml/2006/main">
+        <p:nvSpPr>
+          <p:cNvPr id="9" name="TextBox 8"/>
+          <p:cNvSpPr txBox="1"/>
           <p:nvPr/>
         </p:nvSpPr>
         <p:spPr>
-          <a:xfrm xmlns:a="http://schemas.openxmlformats.org/drawingml/2006/main">
-            <a:off x="666750" y="4276725"/>
-            <a:ext cx="10572750" cy="1123950"/>
+          <a:xfrm>
+            <a:off x="822960" y="4800600"/>
+            <a:ext cx="10515600" cy="640080"/>
           </a:xfrm>
-          <a:prstGeom xmlns:a="http://schemas.openxmlformats.org/drawingml/2006/main" prst="rect">
+          <a:prstGeom prst="rect">
             <a:avLst/>
           </a:prstGeom>
-          <a:noFill xmlns:a="http://schemas.openxmlformats.org/drawingml/2006/main"/>
-          <a:ln xmlns:a="http://schemas.openxmlformats.org/drawingml/2006/main" w="0">
-            <a:noFill/>
-          </a:ln>
+          <a:noFill/>
         </p:spPr>
         <p:txBody>
-          <a:bodyPr xmlns:a="http://schemas.openxmlformats.org/drawingml/2006/main" lIns="0" tIns="0" rIns="0" bIns="0"/>
-          <a:lstStyle xmlns:a="http://schemas.openxmlformats.org/drawingml/2006/main">
-            <a:defPPr>
-              <a:defRPr sz="2250" b="0">
-                <a:solidFill>
-                  <a:srgbClr val="172A36"/>
-                </a:solidFill>
-                <a:latin typeface="Arial"/>
-                <a:ea typeface="Arial"/>
-                <a:cs typeface="Arial"/>
-              </a:defRPr>
-            </a:defPPr>
-            <a:lvl1pPr>
-              <a:defRPr sz="2250" b="0">
-                <a:solidFill>
-                  <a:srgbClr val="172A36"/>
-                </a:solidFill>
-                <a:latin typeface="Arial"/>
-                <a:ea typeface="Arial"/>
-                <a:cs typeface="Arial"/>
-              </a:defRPr>
-            </a:lvl1pPr>
-            <a:lvl2pPr>
-              <a:defRPr sz="2250" b="0">
-                <a:solidFill>
-                  <a:srgbClr val="172A36"/>
-                </a:solidFill>
-                <a:latin typeface="Arial"/>
-                <a:ea typeface="Arial"/>
-                <a:cs typeface="Arial"/>
-              </a:defRPr>
-            </a:lvl2pPr>
-            <a:lvl3pPr>
-              <a:defRPr sz="2250" b="0">
-                <a:solidFill>
-                  <a:srgbClr val="172A36"/>
-                </a:solidFill>
-                <a:latin typeface="Arial"/>
-                <a:ea typeface="Arial"/>
-                <a:cs typeface="Arial"/>
-              </a:defRPr>
-            </a:lvl3pPr>
-            <a:lvl4pPr>
-              <a:defRPr sz="2250" b="0">
-                <a:solidFill>
-                  <a:srgbClr val="172A36"/>
-                </a:solidFill>
-                <a:latin typeface="Arial"/>
-                <a:ea typeface="Arial"/>
-                <a:cs typeface="Arial"/>
-              </a:defRPr>
-            </a:lvl4pPr>
-            <a:lvl5pPr>
-              <a:defRPr sz="2250" b="0">
-                <a:solidFill>
-                  <a:srgbClr val="172A36"/>
-                </a:solidFill>
-                <a:latin typeface="Arial"/>
-                <a:ea typeface="Arial"/>
-                <a:cs typeface="Arial"/>
-              </a:defRPr>
-            </a:lvl5pPr>
-            <a:lvl6pPr>
-              <a:defRPr sz="2250" b="0">
-                <a:solidFill>
-                  <a:srgbClr val="172A36"/>
-                </a:solidFill>
-                <a:latin typeface="Arial"/>
-                <a:ea typeface="Arial"/>
-                <a:cs typeface="Arial"/>
-              </a:defRPr>
-            </a:lvl6pPr>
-            <a:lvl7pPr>
-              <a:defRPr sz="2250" b="0">
-                <a:solidFill>
-                  <a:srgbClr val="172A36"/>
-                </a:solidFill>
-                <a:latin typeface="Arial"/>
-                <a:ea typeface="Arial"/>
-                <a:cs typeface="Arial"/>
-              </a:defRPr>
-            </a:lvl7pPr>
-            <a:lvl8pPr>
-              <a:defRPr sz="2250" b="0">
-                <a:solidFill>
-                  <a:srgbClr val="172A36"/>
-                </a:solidFill>
-                <a:latin typeface="Arial"/>
-                <a:ea typeface="Arial"/>
-                <a:cs typeface="Arial"/>
-              </a:defRPr>
-            </a:lvl8pPr>
-            <a:lvl9pPr>
-              <a:defRPr sz="2250" b="0">
-                <a:solidFill>
-                  <a:srgbClr val="172A36"/>
-                </a:solidFill>
-                <a:latin typeface="Arial"/>
-                <a:ea typeface="Arial"/>
-                <a:cs typeface="Arial"/>
-              </a:defRPr>
-            </a:lvl9pPr>
-          </a:lstStyle>
-          <a:p xmlns:a="http://schemas.openxmlformats.org/drawingml/2006/main">
+          <a:bodyPr wrap="square" lIns="128016" rIns="128016" tIns="91440">
+            <a:spAutoFit/>
+          </a:bodyPr>
+          <a:lstStyle/>
+          <a:p>
             <a:pPr>
-              <a:defRPr sz="2250" b="0">
-                <a:solidFill>
-                  <a:srgbClr val="172A36"/>
-                </a:solidFill>
-                <a:latin typeface="Arial"/>
-                <a:ea typeface="Arial"/>
-                <a:cs typeface="Arial"/>
-              </a:defRPr>
-            </a:pPr>
-            <a:r>
-              <a:rPr sz="2250" b="0">
-                <a:solidFill>
-                  <a:srgbClr val="172A36"/>
-                </a:solidFill>
-                <a:latin typeface="Arial"/>
-                <a:ea typeface="Arial"/>
-                <a:cs typeface="Arial"/>
-              </a:rPr>
-              <a:t>C) higher pay may reduce quitting. It does not raise the 3-unit physical limit.</a:t>
-            </a:r>
-          </a:p>
-          <a:p xmlns:a="http://schemas.openxmlformats.org/drawingml/2006/main">
-            <a:pPr>
-              <a:defRPr sz="2250" b="0">
-                <a:solidFill>
-                  <a:srgbClr val="172A36"/>
-                </a:solidFill>
-                <a:latin typeface="Arial"/>
-                <a:ea typeface="Arial"/>
-                <a:cs typeface="Arial"/>
-              </a:defRPr>
-            </a:pPr>
-            <a:r>
-              <a:rPr sz="2250" b="0">
-                <a:solidFill>
-                  <a:srgbClr val="172A36"/>
-                </a:solidFill>
-                <a:latin typeface="Arial"/>
-                <a:ea typeface="Arial"/>
-                <a:cs typeface="Arial"/>
-              </a:rPr>
-              <a:t>A decision needs evidence on cost, retention, quality, and workload.</a:t>
-            </a:r>
-          </a:p>
-        </p:txBody>
-      </p:sp>
-      <p:sp>
-        <p:nvSpPr>
-          <p:cNvPr id="5" name="">
-            <a:extLst xmlns:a="http://schemas.openxmlformats.org/drawingml/2006/main">
-              <a:ext uri="{FF2B5EF4-FFF2-40B4-BE49-F238E27FC236}">
-                <a16:creationId xmlns:a16="http://schemas.microsoft.com/office/drawing/2014/main" id="{D938B5CE-38C3-43E9-9466-D2A491D6124D}"/>
-              </a:ext>
-            </a:extLst>
-          </p:cNvPr>
-          <p:cNvSpPr>
-            <a:spLocks xmlns:a="http://schemas.openxmlformats.org/drawingml/2006/main" noGrp="1"/>
-          </p:cNvSpPr>
+              <a:spcAft>
+                <a:spcPts val="800"/>
+              </a:spcAft>
+              <a:defRPr sz="2300" b="0">
+                <a:solidFill>
+                  <a:srgbClr val="17303B"/>
+                </a:solidFill>
+                <a:latin typeface="Aptos"/>
+              </a:defRPr>
+            </a:pPr>
+            <a:r>
+              <a:t>The initial $5 package included wages plus conditional profit sharing.</a:t>
+            </a:r>
+          </a:p>
+        </p:txBody>
+      </p:sp>
+      <p:sp xmlns:a="http://schemas.openxmlformats.org/drawingml/2006/main">
+        <p:nvSpPr>
+          <p:cNvPr id="10" name="TextBox 9"/>
+          <p:cNvSpPr txBox="1"/>
           <p:nvPr/>
         </p:nvSpPr>
         <p:spPr>
-          <a:xfrm xmlns:a="http://schemas.openxmlformats.org/drawingml/2006/main">
-            <a:off x="666750" y="6096000"/>
-            <a:ext cx="10715625" cy="238125"/>
+          <a:xfrm>
+            <a:off x="822960" y="5623560"/>
+            <a:ext cx="10515600" cy="548640"/>
           </a:xfrm>
-          <a:prstGeom xmlns:a="http://schemas.openxmlformats.org/drawingml/2006/main" prst="rect">
+          <a:prstGeom prst="rect">
             <a:avLst/>
           </a:prstGeom>
-          <a:noFill xmlns:a="http://schemas.openxmlformats.org/drawingml/2006/main"/>
-          <a:ln xmlns:a="http://schemas.openxmlformats.org/drawingml/2006/main" w="0">
-            <a:noFill/>
-          </a:ln>
+          <a:noFill/>
         </p:spPr>
         <p:txBody>
-          <a:bodyPr xmlns:a="http://schemas.openxmlformats.org/drawingml/2006/main" lIns="0" tIns="0" rIns="0" bIns="0"/>
-          <a:lstStyle xmlns:a="http://schemas.openxmlformats.org/drawingml/2006/main">
-            <a:defPPr>
-              <a:defRPr sz="1350" b="0">
-                <a:solidFill>
-                  <a:srgbClr val="A95D35"/>
-                </a:solidFill>
-                <a:latin typeface="Arial"/>
-                <a:ea typeface="Arial"/>
-                <a:cs typeface="Arial"/>
-              </a:defRPr>
-            </a:defPPr>
-            <a:lvl1pPr>
-              <a:defRPr sz="1350" b="0">
-                <a:solidFill>
-                  <a:srgbClr val="A95D35"/>
-                </a:solidFill>
-                <a:latin typeface="Arial"/>
-                <a:ea typeface="Arial"/>
-                <a:cs typeface="Arial"/>
-              </a:defRPr>
-            </a:lvl1pPr>
-            <a:lvl2pPr>
-              <a:defRPr sz="1350" b="0">
-                <a:solidFill>
-                  <a:srgbClr val="A95D35"/>
-                </a:solidFill>
-                <a:latin typeface="Arial"/>
-                <a:ea typeface="Arial"/>
-                <a:cs typeface="Arial"/>
-              </a:defRPr>
-            </a:lvl2pPr>
-            <a:lvl3pPr>
-              <a:defRPr sz="1350" b="0">
-                <a:solidFill>
-                  <a:srgbClr val="A95D35"/>
-                </a:solidFill>
-                <a:latin typeface="Arial"/>
-                <a:ea typeface="Arial"/>
-                <a:cs typeface="Arial"/>
-              </a:defRPr>
-            </a:lvl3pPr>
-            <a:lvl4pPr>
-              <a:defRPr sz="1350" b="0">
-                <a:solidFill>
-                  <a:srgbClr val="A95D35"/>
-                </a:solidFill>
-                <a:latin typeface="Arial"/>
-                <a:ea typeface="Arial"/>
-                <a:cs typeface="Arial"/>
-              </a:defRPr>
-            </a:lvl4pPr>
-            <a:lvl5pPr>
-              <a:defRPr sz="1350" b="0">
-                <a:solidFill>
-                  <a:srgbClr val="A95D35"/>
-                </a:solidFill>
-                <a:latin typeface="Arial"/>
-                <a:ea typeface="Arial"/>
-                <a:cs typeface="Arial"/>
-              </a:defRPr>
-            </a:lvl5pPr>
-            <a:lvl6pPr>
-              <a:defRPr sz="1350" b="0">
-                <a:solidFill>
-                  <a:srgbClr val="A95D35"/>
-                </a:solidFill>
-                <a:latin typeface="Arial"/>
-                <a:ea typeface="Arial"/>
-                <a:cs typeface="Arial"/>
-              </a:defRPr>
-            </a:lvl6pPr>
-            <a:lvl7pPr>
-              <a:defRPr sz="1350" b="0">
-                <a:solidFill>
-                  <a:srgbClr val="A95D35"/>
-                </a:solidFill>
-                <a:latin typeface="Arial"/>
-                <a:ea typeface="Arial"/>
-                <a:cs typeface="Arial"/>
-              </a:defRPr>
-            </a:lvl7pPr>
-            <a:lvl8pPr>
-              <a:defRPr sz="1350" b="0">
-                <a:solidFill>
-                  <a:srgbClr val="A95D35"/>
-                </a:solidFill>
-                <a:latin typeface="Arial"/>
-                <a:ea typeface="Arial"/>
-                <a:cs typeface="Arial"/>
-              </a:defRPr>
-            </a:lvl8pPr>
-            <a:lvl9pPr>
-              <a:defRPr sz="1350" b="0">
-                <a:solidFill>
-                  <a:srgbClr val="A95D35"/>
-                </a:solidFill>
-                <a:latin typeface="Arial"/>
-                <a:ea typeface="Arial"/>
-                <a:cs typeface="Arial"/>
-              </a:defRPr>
-            </a:lvl9pPr>
-          </a:lstStyle>
-          <a:p xmlns:a="http://schemas.openxmlformats.org/drawingml/2006/main">
+          <a:bodyPr wrap="square" lIns="128016" rIns="128016" tIns="91440">
+            <a:spAutoFit/>
+          </a:bodyPr>
+          <a:lstStyle/>
+          <a:p>
             <a:pPr>
-              <a:defRPr sz="1350" b="0">
-                <a:solidFill>
-                  <a:srgbClr val="A95D35"/>
-                </a:solidFill>
-                <a:latin typeface="Arial"/>
-                <a:ea typeface="Arial"/>
-                <a:cs typeface="Arial"/>
-              </a:defRPr>
-            </a:pPr>
-            <a:r>
-              <a:rPr sz="1350" b="0">
-                <a:solidFill>
-                  <a:srgbClr val="A95D35"/>
-                </a:solidFill>
-                <a:latin typeface="Arial"/>
-                <a:ea typeface="Arial"/>
-                <a:cs typeface="Arial"/>
-              </a:rPr>
-              <a:t>Ch. 4: evaluate alternatives. Ch. 9: assess retention rather than assume it.</a:t>
-            </a:r>
-          </a:p>
-        </p:txBody>
-      </p:sp>
-      <p:sp>
-        <p:nvSpPr>
-          <p:cNvPr id="6" name="">
-            <a:extLst xmlns:a="http://schemas.openxmlformats.org/drawingml/2006/main">
-              <a:ext uri="{FF2B5EF4-FFF2-40B4-BE49-F238E27FC236}">
-                <a16:creationId xmlns:a16="http://schemas.microsoft.com/office/drawing/2014/main" id="{BB399891-3583-419B-8DD3-9507C487B4DF}"/>
-              </a:ext>
-            </a:extLst>
-          </p:cNvPr>
-          <p:cNvSpPr>
-            <a:spLocks xmlns:a="http://schemas.openxmlformats.org/drawingml/2006/main" noGrp="1"/>
-          </p:cNvSpPr>
-          <p:nvPr/>
-        </p:nvSpPr>
-        <p:spPr>
-          <a:xfrm xmlns:a="http://schemas.openxmlformats.org/drawingml/2006/main">
-            <a:off x="666750" y="6429375"/>
-            <a:ext cx="9525000" cy="209550"/>
-          </a:xfrm>
-          <a:prstGeom xmlns:a="http://schemas.openxmlformats.org/drawingml/2006/main" prst="rect">
-            <a:avLst/>
-          </a:prstGeom>
-          <a:noFill xmlns:a="http://schemas.openxmlformats.org/drawingml/2006/main"/>
-          <a:ln xmlns:a="http://schemas.openxmlformats.org/drawingml/2006/main" w="0">
-            <a:noFill/>
-          </a:ln>
-        </p:spPr>
-        <p:txBody>
-          <a:bodyPr xmlns:a="http://schemas.openxmlformats.org/drawingml/2006/main" lIns="0" tIns="0" rIns="0" bIns="0"/>
-          <a:lstStyle xmlns:a="http://schemas.openxmlformats.org/drawingml/2006/main">
-            <a:defPPr>
-              <a:defRPr sz="1125" b="0">
-                <a:solidFill>
-                  <a:srgbClr val="55636A"/>
-                </a:solidFill>
-                <a:latin typeface="Arial"/>
-                <a:ea typeface="Arial"/>
-                <a:cs typeface="Arial"/>
-              </a:defRPr>
-            </a:defPPr>
-            <a:lvl1pPr>
-              <a:defRPr sz="1125" b="0">
-                <a:solidFill>
-                  <a:srgbClr val="55636A"/>
-                </a:solidFill>
-                <a:latin typeface="Arial"/>
-                <a:ea typeface="Arial"/>
-                <a:cs typeface="Arial"/>
-              </a:defRPr>
-            </a:lvl1pPr>
-            <a:lvl2pPr>
-              <a:defRPr sz="1125" b="0">
-                <a:solidFill>
-                  <a:srgbClr val="55636A"/>
-                </a:solidFill>
-                <a:latin typeface="Arial"/>
-                <a:ea typeface="Arial"/>
-                <a:cs typeface="Arial"/>
-              </a:defRPr>
-            </a:lvl2pPr>
-            <a:lvl3pPr>
-              <a:defRPr sz="1125" b="0">
-                <a:solidFill>
-                  <a:srgbClr val="55636A"/>
-                </a:solidFill>
-                <a:latin typeface="Arial"/>
-                <a:ea typeface="Arial"/>
-                <a:cs typeface="Arial"/>
-              </a:defRPr>
-            </a:lvl3pPr>
-            <a:lvl4pPr>
-              <a:defRPr sz="1125" b="0">
-                <a:solidFill>
-                  <a:srgbClr val="55636A"/>
-                </a:solidFill>
-                <a:latin typeface="Arial"/>
-                <a:ea typeface="Arial"/>
-                <a:cs typeface="Arial"/>
-              </a:defRPr>
-            </a:lvl4pPr>
-            <a:lvl5pPr>
-              <a:defRPr sz="1125" b="0">
-                <a:solidFill>
-                  <a:srgbClr val="55636A"/>
-                </a:solidFill>
-                <a:latin typeface="Arial"/>
-                <a:ea typeface="Arial"/>
-                <a:cs typeface="Arial"/>
-              </a:defRPr>
-            </a:lvl5pPr>
-            <a:lvl6pPr>
-              <a:defRPr sz="1125" b="0">
-                <a:solidFill>
-                  <a:srgbClr val="55636A"/>
-                </a:solidFill>
-                <a:latin typeface="Arial"/>
-                <a:ea typeface="Arial"/>
-                <a:cs typeface="Arial"/>
-              </a:defRPr>
-            </a:lvl6pPr>
-            <a:lvl7pPr>
-              <a:defRPr sz="1125" b="0">
-                <a:solidFill>
-                  <a:srgbClr val="55636A"/>
-                </a:solidFill>
-                <a:latin typeface="Arial"/>
-                <a:ea typeface="Arial"/>
-                <a:cs typeface="Arial"/>
-              </a:defRPr>
-            </a:lvl7pPr>
-            <a:lvl8pPr>
-              <a:defRPr sz="1125" b="0">
-                <a:solidFill>
-                  <a:srgbClr val="55636A"/>
-                </a:solidFill>
-                <a:latin typeface="Arial"/>
-                <a:ea typeface="Arial"/>
-                <a:cs typeface="Arial"/>
-              </a:defRPr>
-            </a:lvl8pPr>
-            <a:lvl9pPr>
-              <a:defRPr sz="1125" b="0">
-                <a:solidFill>
-                  <a:srgbClr val="55636A"/>
-                </a:solidFill>
-                <a:latin typeface="Arial"/>
-                <a:ea typeface="Arial"/>
-                <a:cs typeface="Arial"/>
-              </a:defRPr>
-            </a:lvl9pPr>
-          </a:lstStyle>
-          <a:p xmlns:a="http://schemas.openxmlformats.org/drawingml/2006/main">
-            <a:pPr>
-              <a:defRPr sz="1125" b="0">
-                <a:solidFill>
-                  <a:srgbClr val="55636A"/>
-                </a:solidFill>
-                <a:latin typeface="Arial"/>
-                <a:ea typeface="Arial"/>
-                <a:cs typeface="Arial"/>
-              </a:defRPr>
-            </a:pPr>
-            <a:r>
-              <a:rPr sz="1125" b="0">
-                <a:solidFill>
-                  <a:srgbClr val="55636A"/>
-                </a:solidFill>
-                <a:latin typeface="Arial"/>
-                <a:ea typeface="Arial"/>
-                <a:cs typeface="Arial"/>
-              </a:rPr>
-              <a:t>Classroom model. All values and policy choices are hypothetical.</a:t>
-            </a:r>
-          </a:p>
-        </p:txBody>
-      </p:sp>
-      <p:sp>
-        <p:nvSpPr>
-          <p:cNvPr id="7" name="">
-            <a:extLst xmlns:a="http://schemas.openxmlformats.org/drawingml/2006/main">
-              <a:ext uri="{FF2B5EF4-FFF2-40B4-BE49-F238E27FC236}">
-                <a16:creationId xmlns:a16="http://schemas.microsoft.com/office/drawing/2014/main" id="{96B10B06-639D-4A9C-82B9-1FAD3947ECE7}"/>
-              </a:ext>
-            </a:extLst>
-          </p:cNvPr>
-          <p:cNvSpPr>
-            <a:spLocks xmlns:a="http://schemas.openxmlformats.org/drawingml/2006/main" noGrp="1"/>
-          </p:cNvSpPr>
-          <p:nvPr/>
-        </p:nvSpPr>
-        <p:spPr>
-          <a:xfrm xmlns:a="http://schemas.openxmlformats.org/drawingml/2006/main">
-            <a:off x="11430000" y="6429375"/>
-            <a:ext cx="428625" cy="209550"/>
-          </a:xfrm>
-          <a:prstGeom xmlns:a="http://schemas.openxmlformats.org/drawingml/2006/main" prst="rect">
-            <a:avLst/>
-          </a:prstGeom>
-          <a:noFill xmlns:a="http://schemas.openxmlformats.org/drawingml/2006/main"/>
-          <a:ln xmlns:a="http://schemas.openxmlformats.org/drawingml/2006/main" w="0">
-            <a:noFill/>
-          </a:ln>
-        </p:spPr>
-        <p:txBody>
-          <a:bodyPr xmlns:a="http://schemas.openxmlformats.org/drawingml/2006/main" lIns="0" tIns="0" rIns="0" bIns="0"/>
-          <a:lstStyle xmlns:a="http://schemas.openxmlformats.org/drawingml/2006/main">
-            <a:defPPr>
-              <a:defRPr sz="1125" b="0">
-                <a:solidFill>
-                  <a:srgbClr val="55636A"/>
-                </a:solidFill>
-                <a:latin typeface="Arial"/>
-                <a:ea typeface="Arial"/>
-                <a:cs typeface="Arial"/>
-              </a:defRPr>
-            </a:defPPr>
-            <a:lvl1pPr>
-              <a:defRPr sz="1125" b="0">
-                <a:solidFill>
-                  <a:srgbClr val="55636A"/>
-                </a:solidFill>
-                <a:latin typeface="Arial"/>
-                <a:ea typeface="Arial"/>
-                <a:cs typeface="Arial"/>
-              </a:defRPr>
-            </a:lvl1pPr>
-            <a:lvl2pPr>
-              <a:defRPr sz="1125" b="0">
-                <a:solidFill>
-                  <a:srgbClr val="55636A"/>
-                </a:solidFill>
-                <a:latin typeface="Arial"/>
-                <a:ea typeface="Arial"/>
-                <a:cs typeface="Arial"/>
-              </a:defRPr>
-            </a:lvl2pPr>
-            <a:lvl3pPr>
-              <a:defRPr sz="1125" b="0">
-                <a:solidFill>
-                  <a:srgbClr val="55636A"/>
-                </a:solidFill>
-                <a:latin typeface="Arial"/>
-                <a:ea typeface="Arial"/>
-                <a:cs typeface="Arial"/>
-              </a:defRPr>
-            </a:lvl3pPr>
-            <a:lvl4pPr>
-              <a:defRPr sz="1125" b="0">
-                <a:solidFill>
-                  <a:srgbClr val="55636A"/>
-                </a:solidFill>
-                <a:latin typeface="Arial"/>
-                <a:ea typeface="Arial"/>
-                <a:cs typeface="Arial"/>
-              </a:defRPr>
-            </a:lvl4pPr>
-            <a:lvl5pPr>
-              <a:defRPr sz="1125" b="0">
-                <a:solidFill>
-                  <a:srgbClr val="55636A"/>
-                </a:solidFill>
-                <a:latin typeface="Arial"/>
-                <a:ea typeface="Arial"/>
-                <a:cs typeface="Arial"/>
-              </a:defRPr>
-            </a:lvl5pPr>
-            <a:lvl6pPr>
-              <a:defRPr sz="1125" b="0">
-                <a:solidFill>
-                  <a:srgbClr val="55636A"/>
-                </a:solidFill>
-                <a:latin typeface="Arial"/>
-                <a:ea typeface="Arial"/>
-                <a:cs typeface="Arial"/>
-              </a:defRPr>
-            </a:lvl6pPr>
-            <a:lvl7pPr>
-              <a:defRPr sz="1125" b="0">
-                <a:solidFill>
-                  <a:srgbClr val="55636A"/>
-                </a:solidFill>
-                <a:latin typeface="Arial"/>
-                <a:ea typeface="Arial"/>
-                <a:cs typeface="Arial"/>
-              </a:defRPr>
-            </a:lvl7pPr>
-            <a:lvl8pPr>
-              <a:defRPr sz="1125" b="0">
-                <a:solidFill>
-                  <a:srgbClr val="55636A"/>
-                </a:solidFill>
-                <a:latin typeface="Arial"/>
-                <a:ea typeface="Arial"/>
-                <a:cs typeface="Arial"/>
-              </a:defRPr>
-            </a:lvl8pPr>
-            <a:lvl9pPr>
-              <a:defRPr sz="1125" b="0">
-                <a:solidFill>
-                  <a:srgbClr val="55636A"/>
-                </a:solidFill>
-                <a:latin typeface="Arial"/>
-                <a:ea typeface="Arial"/>
-                <a:cs typeface="Arial"/>
-              </a:defRPr>
-            </a:lvl9pPr>
-          </a:lstStyle>
-          <a:p xmlns:a="http://schemas.openxmlformats.org/drawingml/2006/main">
-            <a:pPr>
-              <a:defRPr sz="1125" b="0">
-                <a:solidFill>
-                  <a:srgbClr val="55636A"/>
-                </a:solidFill>
-                <a:latin typeface="Arial"/>
-                <a:ea typeface="Arial"/>
-                <a:cs typeface="Arial"/>
-              </a:defRPr>
-            </a:pPr>
-            <a:r>
-              <a:rPr sz="1125" b="0">
-                <a:solidFill>
-                  <a:srgbClr val="55636A"/>
-                </a:solidFill>
-                <a:latin typeface="Arial"/>
-                <a:ea typeface="Arial"/>
-                <a:cs typeface="Arial"/>
-              </a:rPr>
-              <a:t>07</a:t>
+              <a:spcAft>
+                <a:spcPts val="800"/>
+              </a:spcAft>
+              <a:defRPr sz="2300" b="0">
+                <a:solidFill>
+                  <a:srgbClr val="17303B"/>
+                </a:solidFill>
+                <a:latin typeface="Aptos"/>
+              </a:defRPr>
+            </a:pPr>
+            <a:r>
+              <a:t>How does this compare with your plan? What problems might remain?</a:t>
             </a:r>
           </a:p>
         </p:txBody>
@@ -23884,65 +22254,7 @@
                 <a:ea typeface="Arial"/>
                 <a:cs typeface="Arial"/>
               </a:rPr>
-              <a:t>08</a:t>
-            </a:r>
-          </a:p>
-        </p:txBody>
-      </p:sp>
-      <p:sp>
-        <p:nvSpPr>
-          <p:cNvPr id="6" name="Rectangle 5">
-            <a:extLst xmlns:a="http://schemas.openxmlformats.org/drawingml/2006/main">
-              <a:ext uri="{FF2B5EF4-FFF2-40B4-BE49-F238E27FC236}">
-                <a16:creationId xmlns:a16="http://schemas.microsoft.com/office/drawing/2014/main" id="{933E589F-3944-40ED-902B-71538DC5DB5E}"/>
-              </a:ext>
-            </a:extLst>
-          </p:cNvPr>
-          <p:cNvSpPr>
-            <a:spLocks xmlns:a="http://schemas.openxmlformats.org/drawingml/2006/main" noGrp="1"/>
-          </p:cNvSpPr>
-          <p:nvPr/>
-        </p:nvSpPr>
-        <p:spPr>
-          <a:xfrm xmlns:a="http://schemas.openxmlformats.org/drawingml/2006/main">
-            <a:off x="666750" y="6429375"/>
-            <a:ext cx="9525000" cy="209550"/>
-          </a:xfrm>
-          <a:prstGeom xmlns:a="http://schemas.openxmlformats.org/drawingml/2006/main" prst="rect">
-            <a:avLst/>
-          </a:prstGeom>
-          <a:noFill xmlns:a="http://schemas.openxmlformats.org/drawingml/2006/main"/>
-          <a:ln xmlns:a="http://schemas.openxmlformats.org/drawingml/2006/main" w="0">
-            <a:noFill/>
-          </a:ln>
-        </p:spPr>
-        <p:txBody>
-          <a:bodyPr xmlns:a="http://schemas.openxmlformats.org/drawingml/2006/main" lIns="0" tIns="0" rIns="0" bIns="0">
-            <a:noAutofit/>
-          </a:bodyPr>
-          <a:lstStyle xmlns:a="http://schemas.openxmlformats.org/drawingml/2006/main"/>
-          <a:p xmlns:a="http://schemas.openxmlformats.org/drawingml/2006/main">
-            <a:pPr>
-              <a:buNone/>
-              <a:defRPr sz="1125" b="0">
-                <a:solidFill>
-                  <a:srgbClr val="55636A"/>
-                </a:solidFill>
-                <a:latin typeface="Arial"/>
-                <a:ea typeface="Arial"/>
-                <a:cs typeface="Arial"/>
-              </a:defRPr>
-            </a:pPr>
-            <a:r>
-              <a:rPr sz="1125" b="0">
-                <a:solidFill>
-                  <a:srgbClr val="55636A"/>
-                </a:solidFill>
-                <a:latin typeface="Arial"/>
-                <a:ea typeface="Arial"/>
-                <a:cs typeface="Arial"/>
-              </a:rPr>
-              <a:t>[B] [D]</a:t>
+              <a:t>09</a:t>
             </a:r>
           </a:p>
         </p:txBody>
@@ -24329,65 +22641,7 @@
                 <a:ea typeface="Arial"/>
                 <a:cs typeface="Arial"/>
               </a:rPr>
-              <a:t>09</a:t>
-            </a:r>
-          </a:p>
-        </p:txBody>
-      </p:sp>
-      <p:sp>
-        <p:nvSpPr>
-          <p:cNvPr id="6" name="Rectangle 5">
-            <a:extLst xmlns:a="http://schemas.openxmlformats.org/drawingml/2006/main">
-              <a:ext uri="{FF2B5EF4-FFF2-40B4-BE49-F238E27FC236}">
-                <a16:creationId xmlns:a16="http://schemas.microsoft.com/office/drawing/2014/main" id="{80C9E772-0B96-465D-A9BD-442C125E3AD4}"/>
-              </a:ext>
-            </a:extLst>
-          </p:cNvPr>
-          <p:cNvSpPr>
-            <a:spLocks xmlns:a="http://schemas.openxmlformats.org/drawingml/2006/main" noGrp="1"/>
-          </p:cNvSpPr>
-          <p:nvPr/>
-        </p:nvSpPr>
-        <p:spPr>
-          <a:xfrm xmlns:a="http://schemas.openxmlformats.org/drawingml/2006/main">
-            <a:off x="666750" y="6429375"/>
-            <a:ext cx="9525000" cy="209550"/>
-          </a:xfrm>
-          <a:prstGeom xmlns:a="http://schemas.openxmlformats.org/drawingml/2006/main" prst="rect">
-            <a:avLst/>
-          </a:prstGeom>
-          <a:noFill xmlns:a="http://schemas.openxmlformats.org/drawingml/2006/main"/>
-          <a:ln xmlns:a="http://schemas.openxmlformats.org/drawingml/2006/main" w="0">
-            <a:noFill/>
-          </a:ln>
-        </p:spPr>
-        <p:txBody>
-          <a:bodyPr xmlns:a="http://schemas.openxmlformats.org/drawingml/2006/main" lIns="0" tIns="0" rIns="0" bIns="0">
-            <a:noAutofit/>
-          </a:bodyPr>
-          <a:lstStyle xmlns:a="http://schemas.openxmlformats.org/drawingml/2006/main"/>
-          <a:p xmlns:a="http://schemas.openxmlformats.org/drawingml/2006/main">
-            <a:pPr>
-              <a:buNone/>
-              <a:defRPr sz="1125" b="0">
-                <a:solidFill>
-                  <a:srgbClr val="55636A"/>
-                </a:solidFill>
-                <a:latin typeface="Arial"/>
-                <a:ea typeface="Arial"/>
-                <a:cs typeface="Arial"/>
-              </a:defRPr>
-            </a:pPr>
-            <a:r>
-              <a:rPr sz="1125" b="0">
-                <a:solidFill>
-                  <a:srgbClr val="55636A"/>
-                </a:solidFill>
-                <a:latin typeface="Arial"/>
-                <a:ea typeface="Arial"/>
-                <a:cs typeface="Arial"/>
-              </a:rPr>
-              <a:t>[C]</a:t>
+              <a:t>10</a:t>
             </a:r>
           </a:p>
         </p:txBody>
